--- a/Plano_V02_iii_AM_FEG/d.pptx
+++ b/Plano_V02_iii_AM_FEG/d.pptx
@@ -13,11 +13,12 @@
     <p:sldId id="266" r:id="rId7"/>
     <p:sldId id="268" r:id="rId8"/>
     <p:sldId id="264" r:id="rId9"/>
-    <p:sldId id="271" r:id="rId10"/>
-    <p:sldId id="258" r:id="rId11"/>
-    <p:sldId id="261" r:id="rId12"/>
-    <p:sldId id="257" r:id="rId13"/>
-    <p:sldId id="265" r:id="rId14"/>
+    <p:sldId id="272" r:id="rId10"/>
+    <p:sldId id="271" r:id="rId11"/>
+    <p:sldId id="258" r:id="rId12"/>
+    <p:sldId id="261" r:id="rId13"/>
+    <p:sldId id="257" r:id="rId14"/>
+    <p:sldId id="265" r:id="rId15"/>
   </p:sldIdLst>
   <p:sldSz cx="12192000" cy="6858000"/>
   <p:notesSz cx="6858000" cy="9144000"/>
@@ -3710,6 +3711,921 @@
 </file>
 
 <file path=ppt/slides/slide10.xml><?xml version="1.0" encoding="utf-8"?>
+<p:sld xmlns:a="http://schemas.openxmlformats.org/drawingml/2006/main" xmlns:r="http://schemas.openxmlformats.org/officeDocument/2006/relationships" xmlns:p="http://schemas.openxmlformats.org/presentationml/2006/main">
+  <p:cSld>
+    <p:spTree>
+      <p:nvGrpSpPr>
+        <p:cNvPr id="1" name=""/>
+        <p:cNvGrpSpPr/>
+        <p:nvPr/>
+      </p:nvGrpSpPr>
+      <p:grpSpPr>
+        <a:xfrm>
+          <a:off x="0" y="0"/>
+          <a:ext cx="0" cy="0"/>
+          <a:chOff x="0" y="0"/>
+          <a:chExt cx="0" cy="0"/>
+        </a:xfrm>
+      </p:grpSpPr>
+      <p:sp>
+        <p:nvSpPr>
+          <p:cNvPr id="29" name="TextBox 28">
+            <a:extLst>
+              <a:ext uri="{FF2B5EF4-FFF2-40B4-BE49-F238E27FC236}">
+                <a16:creationId xmlns:a16="http://schemas.microsoft.com/office/drawing/2014/main" id="{383AFA05-AE80-CBF4-788E-F2994CD23B67}"/>
+              </a:ext>
+            </a:extLst>
+          </p:cNvPr>
+          <p:cNvSpPr txBox="1"/>
+          <p:nvPr/>
+        </p:nvSpPr>
+        <p:spPr>
+          <a:xfrm>
+            <a:off x="11700" y="5783133"/>
+            <a:ext cx="6096000" cy="1077218"/>
+          </a:xfrm>
+          <a:prstGeom prst="rect">
+            <a:avLst/>
+          </a:prstGeom>
+          <a:noFill/>
+        </p:spPr>
+        <p:txBody>
+          <a:bodyPr wrap="square">
+            <a:spAutoFit/>
+          </a:bodyPr>
+          <a:lstStyle/>
+          <a:p>
+            <a:r>
+              <a:rPr lang="en-US" sz="1600" b="1" i="0" u="sng" strike="noStrike" baseline="0" dirty="0">
+                <a:latin typeface="MyriadPro-SemiboldSemiCn"/>
+              </a:rPr>
+              <a:t>- A multi‑criteria </a:t>
+            </a:r>
+            <a:r>
+              <a:rPr lang="en-US" sz="1600" b="1" i="1" u="sng" strike="noStrike" baseline="0" dirty="0">
+                <a:latin typeface="MyriadPro-SemiboldSemiCnIt"/>
+              </a:rPr>
+              <a:t>h</a:t>
+            </a:r>
+            <a:r>
+              <a:rPr lang="en-US" sz="1600" b="1" i="0" u="sng" strike="noStrike" baseline="0" dirty="0">
+                <a:latin typeface="MyriadPro-SemiboldSemiCn"/>
+              </a:rPr>
+              <a:t>‑adaptive finite‑element framework</a:t>
+            </a:r>
+            <a:r>
+              <a:rPr lang="en-US" sz="1200" b="0" i="0" u="none" strike="noStrike" baseline="0" dirty="0">
+                <a:latin typeface="MyriadPro-SemiboldSemiCn"/>
+              </a:rPr>
+              <a:t> for industrial </a:t>
+            </a:r>
+            <a:r>
+              <a:rPr lang="en-GB" sz="1200" b="0" i="0" u="none" strike="noStrike" baseline="0" dirty="0">
+                <a:latin typeface="MyriadPro-SemiboldSemiCn"/>
+              </a:rPr>
+              <a:t>part‑scale thermal analysis in additive manufacturing processes – </a:t>
+            </a:r>
+            <a:r>
+              <a:rPr lang="en-US" sz="1200" dirty="0"/>
+              <a:t>Moreira &amp; </a:t>
+            </a:r>
+            <a:r>
+              <a:rPr lang="en-US" sz="1200" dirty="0" err="1">
+                <a:highlight>
+                  <a:srgbClr val="FFFF00"/>
+                </a:highlight>
+              </a:rPr>
+              <a:t>Chiumenti</a:t>
+            </a:r>
+            <a:r>
+              <a:rPr lang="en-US" sz="1200" dirty="0">
+                <a:highlight>
+                  <a:srgbClr val="FFFF00"/>
+                </a:highlight>
+              </a:rPr>
+              <a:t> </a:t>
+            </a:r>
+            <a:r>
+              <a:rPr lang="en-US" sz="1200" dirty="0"/>
+              <a:t>(2021)</a:t>
+            </a:r>
+          </a:p>
+          <a:p>
+            <a:r>
+              <a:rPr lang="en-GB" sz="1200" dirty="0"/>
+              <a:t>- Numerical simulation and experimental calibration of Additive Manufacturing by blown powder technology. </a:t>
+            </a:r>
+            <a:r>
+              <a:rPr lang="en-US" sz="1200" dirty="0"/>
+              <a:t>Part I: thermal analysis -- M. </a:t>
+            </a:r>
+            <a:r>
+              <a:rPr lang="en-US" sz="1200" dirty="0" err="1">
+                <a:highlight>
+                  <a:srgbClr val="FFFF00"/>
+                </a:highlight>
+              </a:rPr>
+              <a:t>Chiumenti</a:t>
+            </a:r>
+            <a:endParaRPr lang="en-US" sz="1200" dirty="0">
+              <a:highlight>
+                <a:srgbClr val="FFFF00"/>
+              </a:highlight>
+            </a:endParaRPr>
+          </a:p>
+          <a:p>
+            <a:r>
+              <a:rPr lang="en-GB" sz="1200" dirty="0"/>
+              <a:t>- Residual stress and distortion of rectangular and S-shaped Ti-6Al-4V parts </a:t>
+            </a:r>
+            <a:r>
+              <a:rPr lang="en-US" sz="1200" dirty="0"/>
+              <a:t>-- M. </a:t>
+            </a:r>
+            <a:r>
+              <a:rPr lang="en-US" sz="1200" dirty="0" err="1">
+                <a:highlight>
+                  <a:srgbClr val="FFFF00"/>
+                </a:highlight>
+              </a:rPr>
+              <a:t>Chiumenti</a:t>
+            </a:r>
+            <a:endParaRPr lang="LID4096" sz="1200" dirty="0">
+              <a:highlight>
+                <a:srgbClr val="FFFF00"/>
+              </a:highlight>
+            </a:endParaRPr>
+          </a:p>
+        </p:txBody>
+      </p:sp>
+      <p:sp>
+        <p:nvSpPr>
+          <p:cNvPr id="32" name="TextBox 31">
+            <a:extLst>
+              <a:ext uri="{FF2B5EF4-FFF2-40B4-BE49-F238E27FC236}">
+                <a16:creationId xmlns:a16="http://schemas.microsoft.com/office/drawing/2014/main" id="{F2B78473-A7F0-914B-C99C-1BF327B3FDA8}"/>
+              </a:ext>
+            </a:extLst>
+          </p:cNvPr>
+          <p:cNvSpPr txBox="1"/>
+          <p:nvPr/>
+        </p:nvSpPr>
+        <p:spPr>
+          <a:xfrm>
+            <a:off x="529464" y="402903"/>
+            <a:ext cx="4808890" cy="954107"/>
+          </a:xfrm>
+          <a:prstGeom prst="rect">
+            <a:avLst/>
+          </a:prstGeom>
+          <a:noFill/>
+        </p:spPr>
+        <p:txBody>
+          <a:bodyPr wrap="square">
+            <a:spAutoFit/>
+          </a:bodyPr>
+          <a:lstStyle/>
+          <a:p>
+            <a:pPr marL="342900" indent="-342900">
+              <a:buFont typeface="Wingdings" panose="05000000000000000000" pitchFamily="2" charset="2"/>
+              <a:buChar char="Ø"/>
+            </a:pPr>
+            <a:r>
+              <a:rPr lang="en-US" sz="2000" b="1" dirty="0"/>
+              <a:t>h-adaptive finite-element (FE) strategy</a:t>
+            </a:r>
+          </a:p>
+          <a:p>
+            <a:pPr marL="800100" lvl="1" indent="-342900">
+              <a:buFont typeface="Wingdings" panose="05000000000000000000" pitchFamily="2" charset="2"/>
+              <a:buChar char="Ø"/>
+            </a:pPr>
+            <a:r>
+              <a:rPr lang="en-US" b="1" dirty="0"/>
+              <a:t>mesh coarsening and refinement</a:t>
+            </a:r>
+            <a:endParaRPr lang="en-US" sz="2000" b="1" dirty="0"/>
+          </a:p>
+          <a:p>
+            <a:pPr marL="342900" indent="-342900">
+              <a:buFont typeface="Wingdings" panose="05000000000000000000" pitchFamily="2" charset="2"/>
+              <a:buChar char="Ø"/>
+            </a:pPr>
+            <a:r>
+              <a:rPr lang="en-US" b="1" dirty="0">
+                <a:solidFill>
+                  <a:srgbClr val="FF0000"/>
+                </a:solidFill>
+              </a:rPr>
+              <a:t>common layer interface (CLI)  </a:t>
+            </a:r>
+            <a:r>
+              <a:rPr lang="en-US" b="1" dirty="0">
+                <a:solidFill>
+                  <a:srgbClr val="0000FF"/>
+                </a:solidFill>
+              </a:rPr>
+              <a:t>x </a:t>
+            </a:r>
+            <a:r>
+              <a:rPr lang="en-US" b="1" dirty="0" err="1">
+                <a:solidFill>
+                  <a:srgbClr val="0000FF"/>
+                </a:solidFill>
+              </a:rPr>
+              <a:t>GCode</a:t>
+            </a:r>
+            <a:endParaRPr lang="LID4096" b="1" dirty="0">
+              <a:solidFill>
+                <a:srgbClr val="0000FF"/>
+              </a:solidFill>
+            </a:endParaRPr>
+          </a:p>
+        </p:txBody>
+      </p:sp>
+      <p:pic>
+        <p:nvPicPr>
+          <p:cNvPr id="37" name="Picture 36">
+            <a:extLst>
+              <a:ext uri="{FF2B5EF4-FFF2-40B4-BE49-F238E27FC236}">
+                <a16:creationId xmlns:a16="http://schemas.microsoft.com/office/drawing/2014/main" id="{BD4AE64D-142C-C5A6-6B1E-B80609B23FE4}"/>
+              </a:ext>
+            </a:extLst>
+          </p:cNvPr>
+          <p:cNvPicPr>
+            <a:picLocks noChangeAspect="1"/>
+          </p:cNvPicPr>
+          <p:nvPr/>
+        </p:nvPicPr>
+        <p:blipFill>
+          <a:blip r:embed="rId2"/>
+          <a:stretch>
+            <a:fillRect/>
+          </a:stretch>
+        </p:blipFill>
+        <p:spPr>
+          <a:xfrm>
+            <a:off x="503589" y="1519217"/>
+            <a:ext cx="5128574" cy="3646380"/>
+          </a:xfrm>
+          <a:prstGeom prst="rect">
+            <a:avLst/>
+          </a:prstGeom>
+          <a:ln>
+            <a:solidFill>
+              <a:schemeClr val="tx1"/>
+            </a:solidFill>
+          </a:ln>
+          <a:effectLst>
+            <a:outerShdw blurRad="50800" dist="38100" dir="8100000" algn="tr" rotWithShape="0">
+              <a:prstClr val="black">
+                <a:alpha val="40000"/>
+              </a:prstClr>
+            </a:outerShdw>
+          </a:effectLst>
+        </p:spPr>
+      </p:pic>
+      <p:sp>
+        <p:nvSpPr>
+          <p:cNvPr id="3" name="TextBox 2">
+            <a:extLst>
+              <a:ext uri="{FF2B5EF4-FFF2-40B4-BE49-F238E27FC236}">
+                <a16:creationId xmlns:a16="http://schemas.microsoft.com/office/drawing/2014/main" id="{ACF20649-871F-C592-E74E-004711043AA6}"/>
+              </a:ext>
+            </a:extLst>
+          </p:cNvPr>
+          <p:cNvSpPr txBox="1"/>
+          <p:nvPr/>
+        </p:nvSpPr>
+        <p:spPr>
+          <a:xfrm>
+            <a:off x="7340531" y="6063723"/>
+            <a:ext cx="2484119" cy="369332"/>
+          </a:xfrm>
+          <a:prstGeom prst="rect">
+            <a:avLst/>
+          </a:prstGeom>
+          <a:noFill/>
+        </p:spPr>
+        <p:txBody>
+          <a:bodyPr wrap="square">
+            <a:spAutoFit/>
+          </a:bodyPr>
+          <a:lstStyle/>
+          <a:p>
+            <a:r>
+              <a:rPr lang="LID4096" dirty="0"/>
+              <a:t>Caicedo</a:t>
+            </a:r>
+          </a:p>
+        </p:txBody>
+      </p:sp>
+      <p:grpSp>
+        <p:nvGrpSpPr>
+          <p:cNvPr id="8" name="Group 7">
+            <a:extLst>
+              <a:ext uri="{FF2B5EF4-FFF2-40B4-BE49-F238E27FC236}">
+                <a16:creationId xmlns:a16="http://schemas.microsoft.com/office/drawing/2014/main" id="{49CEB4DE-F19B-25D2-D69C-0FB7DBF81CC8}"/>
+              </a:ext>
+            </a:extLst>
+          </p:cNvPr>
+          <p:cNvGrpSpPr/>
+          <p:nvPr/>
+        </p:nvGrpSpPr>
+        <p:grpSpPr>
+          <a:xfrm>
+            <a:off x="6175760" y="1519216"/>
+            <a:ext cx="5641879" cy="3330812"/>
+            <a:chOff x="5870960" y="1834785"/>
+            <a:chExt cx="5641879" cy="3330812"/>
+          </a:xfrm>
+        </p:grpSpPr>
+        <p:grpSp>
+          <p:nvGrpSpPr>
+            <p:cNvPr id="41" name="Group 40">
+              <a:extLst>
+                <a:ext uri="{FF2B5EF4-FFF2-40B4-BE49-F238E27FC236}">
+                  <a16:creationId xmlns:a16="http://schemas.microsoft.com/office/drawing/2014/main" id="{42884BF6-7107-207F-BD5F-B4C5C233DF35}"/>
+                </a:ext>
+              </a:extLst>
+            </p:cNvPr>
+            <p:cNvGrpSpPr/>
+            <p:nvPr/>
+          </p:nvGrpSpPr>
+          <p:grpSpPr>
+            <a:xfrm>
+              <a:off x="5870960" y="1834785"/>
+              <a:ext cx="5641879" cy="3258752"/>
+              <a:chOff x="5564776" y="1514854"/>
+              <a:chExt cx="5641879" cy="3258752"/>
+            </a:xfrm>
+          </p:grpSpPr>
+          <p:pic>
+            <p:nvPicPr>
+              <p:cNvPr id="40" name="Picture 39">
+                <a:extLst>
+                  <a:ext uri="{FF2B5EF4-FFF2-40B4-BE49-F238E27FC236}">
+                    <a16:creationId xmlns:a16="http://schemas.microsoft.com/office/drawing/2014/main" id="{6E57E60B-F3DF-524A-8F29-346395CE7084}"/>
+                  </a:ext>
+                </a:extLst>
+              </p:cNvPr>
+              <p:cNvPicPr>
+                <a:picLocks noChangeAspect="1"/>
+              </p:cNvPicPr>
+              <p:nvPr/>
+            </p:nvPicPr>
+            <p:blipFill>
+              <a:blip r:embed="rId3"/>
+              <a:srcRect t="56742"/>
+              <a:stretch>
+                <a:fillRect/>
+              </a:stretch>
+            </p:blipFill>
+            <p:spPr>
+              <a:xfrm>
+                <a:off x="6253655" y="4077260"/>
+                <a:ext cx="4953000" cy="696346"/>
+              </a:xfrm>
+              <a:prstGeom prst="rect">
+                <a:avLst/>
+              </a:prstGeom>
+            </p:spPr>
+          </p:pic>
+          <p:grpSp>
+            <p:nvGrpSpPr>
+              <p:cNvPr id="33" name="Group 32">
+                <a:extLst>
+                  <a:ext uri="{FF2B5EF4-FFF2-40B4-BE49-F238E27FC236}">
+                    <a16:creationId xmlns:a16="http://schemas.microsoft.com/office/drawing/2014/main" id="{36DAC0AD-FD90-EDDD-759F-9EB4DA08F0A4}"/>
+                  </a:ext>
+                </a:extLst>
+              </p:cNvPr>
+              <p:cNvGrpSpPr/>
+              <p:nvPr/>
+            </p:nvGrpSpPr>
+            <p:grpSpPr>
+              <a:xfrm>
+                <a:off x="5564776" y="1514854"/>
+                <a:ext cx="5357427" cy="2563504"/>
+                <a:chOff x="676003" y="334423"/>
+                <a:chExt cx="5357427" cy="2563504"/>
+              </a:xfrm>
+            </p:grpSpPr>
+            <p:pic>
+              <p:nvPicPr>
+                <p:cNvPr id="5" name="Picture 4">
+                  <a:extLst>
+                    <a:ext uri="{FF2B5EF4-FFF2-40B4-BE49-F238E27FC236}">
+                      <a16:creationId xmlns:a16="http://schemas.microsoft.com/office/drawing/2014/main" id="{E5E0877E-0A06-E5B1-0B43-BBC1749C3AA4}"/>
+                    </a:ext>
+                  </a:extLst>
+                </p:cNvPr>
+                <p:cNvPicPr>
+                  <a:picLocks noChangeAspect="1"/>
+                </p:cNvPicPr>
+                <p:nvPr/>
+              </p:nvPicPr>
+              <p:blipFill>
+                <a:blip r:embed="rId4"/>
+                <a:stretch>
+                  <a:fillRect/>
+                </a:stretch>
+              </p:blipFill>
+              <p:spPr>
+                <a:xfrm>
+                  <a:off x="738051" y="419236"/>
+                  <a:ext cx="1676400" cy="428625"/>
+                </a:xfrm>
+                <a:prstGeom prst="rect">
+                  <a:avLst/>
+                </a:prstGeom>
+              </p:spPr>
+            </p:pic>
+            <p:sp>
+              <p:nvSpPr>
+                <p:cNvPr id="7" name="TextBox 6">
+                  <a:extLst>
+                    <a:ext uri="{FF2B5EF4-FFF2-40B4-BE49-F238E27FC236}">
+                      <a16:creationId xmlns:a16="http://schemas.microsoft.com/office/drawing/2014/main" id="{63826787-2279-F854-B987-63CF4E26EB9C}"/>
+                    </a:ext>
+                  </a:extLst>
+                </p:cNvPr>
+                <p:cNvSpPr txBox="1"/>
+                <p:nvPr/>
+              </p:nvSpPr>
+              <p:spPr>
+                <a:xfrm>
+                  <a:off x="3721053" y="334424"/>
+                  <a:ext cx="2312377" cy="1184940"/>
+                </a:xfrm>
+                <a:prstGeom prst="rect">
+                  <a:avLst/>
+                </a:prstGeom>
+                <a:noFill/>
+                <a:ln>
+                  <a:solidFill>
+                    <a:schemeClr val="tx1"/>
+                  </a:solidFill>
+                </a:ln>
+              </p:spPr>
+              <p:txBody>
+                <a:bodyPr wrap="square">
+                  <a:spAutoFit/>
+                </a:bodyPr>
+                <a:lstStyle/>
+                <a:p>
+                  <a:r>
+                    <a:rPr lang="en-US" sz="1400" b="0" i="1" u="none" strike="noStrike" baseline="0" dirty="0">
+                      <a:solidFill>
+                        <a:srgbClr val="0000FF"/>
+                      </a:solidFill>
+                      <a:latin typeface="STIXMath-Italic"/>
+                    </a:rPr>
+                    <a:t>̇</a:t>
+                  </a:r>
+                  <a:r>
+                    <a:rPr lang="en-US" sz="1400" b="0" i="1" u="none" strike="noStrike" baseline="0" dirty="0">
+                      <a:solidFill>
+                        <a:srgbClr val="0000FF"/>
+                      </a:solidFill>
+                      <a:latin typeface="STIXGeneral-Italic2"/>
+                    </a:rPr>
+                    <a:t>H   </a:t>
+                  </a:r>
+                  <a:r>
+                    <a:rPr lang="en-GB" sz="1400" dirty="0">
+                      <a:solidFill>
+                        <a:srgbClr val="0000FF"/>
+                      </a:solidFill>
+                      <a:latin typeface="STIX-Regular"/>
+                    </a:rPr>
+                    <a:t>rate of enthalpy</a:t>
+                  </a:r>
+                  <a:endParaRPr lang="en-US" sz="1400" b="0" i="1" u="none" strike="noStrike" baseline="0" dirty="0">
+                    <a:solidFill>
+                      <a:srgbClr val="0000FF"/>
+                    </a:solidFill>
+                    <a:latin typeface="STIXGeneral-Italic2"/>
+                  </a:endParaRPr>
+                </a:p>
+                <a:p>
+                  <a:r>
+                    <a:rPr lang="en-GB" sz="1400" b="1" i="1" u="none" strike="noStrike" baseline="0" dirty="0">
+                      <a:solidFill>
+                        <a:srgbClr val="0000FF"/>
+                      </a:solidFill>
+                      <a:latin typeface="STIXGeneral-BoldItalic"/>
+                    </a:rPr>
+                    <a:t>q   </a:t>
+                  </a:r>
+                  <a:r>
+                    <a:rPr lang="en-GB" sz="1400" b="0" i="0" u="none" strike="noStrike" baseline="0" dirty="0">
+                      <a:solidFill>
+                        <a:srgbClr val="0000FF"/>
+                      </a:solidFill>
+                      <a:latin typeface="STIX-Regular"/>
+                    </a:rPr>
+                    <a:t>heat-flux per unit volume</a:t>
+                  </a:r>
+                </a:p>
+                <a:p>
+                  <a:r>
+                    <a:rPr lang="en-GB" sz="1400" i="1" dirty="0">
+                      <a:solidFill>
+                        <a:srgbClr val="0000FF"/>
+                      </a:solidFill>
+                      <a:latin typeface="STIXGeneral-Italic3"/>
+                    </a:rPr>
+                    <a:t>r</a:t>
+                  </a:r>
+                  <a:r>
+                    <a:rPr lang="en-GB" sz="1400" i="1" dirty="0">
+                      <a:solidFill>
+                        <a:srgbClr val="0000FF"/>
+                      </a:solidFill>
+                      <a:latin typeface="STIXMath-Italic"/>
+                    </a:rPr>
+                    <a:t>̇  </a:t>
+                  </a:r>
+                  <a:r>
+                    <a:rPr lang="en-GB" sz="1400" dirty="0">
+                      <a:solidFill>
+                        <a:srgbClr val="0000FF"/>
+                      </a:solidFill>
+                      <a:latin typeface="STIX-Regular"/>
+                    </a:rPr>
+                    <a:t>  rate of heat source</a:t>
+                  </a:r>
+                  <a:endParaRPr lang="en-GB" sz="1400" i="1" dirty="0">
+                    <a:solidFill>
+                      <a:srgbClr val="0000FF"/>
+                    </a:solidFill>
+                    <a:latin typeface="STIXMath-Italic"/>
+                  </a:endParaRPr>
+                </a:p>
+                <a:p>
+                  <a:endParaRPr lang="en-GB" sz="100" b="0" i="0" u="none" strike="noStrike" baseline="0" dirty="0">
+                    <a:solidFill>
+                      <a:srgbClr val="0000FF"/>
+                    </a:solidFill>
+                    <a:latin typeface="STIX-Regular"/>
+                  </a:endParaRPr>
+                </a:p>
+                <a:p>
+                  <a:r>
+                    <a:rPr lang="en-GB" sz="1400" dirty="0">
+                      <a:solidFill>
+                        <a:srgbClr val="0000FF"/>
+                      </a:solidFill>
+                      <a:latin typeface="STIX-Regular"/>
+                    </a:rPr>
+                    <a:t>C   </a:t>
+                  </a:r>
+                  <a:r>
+                    <a:rPr lang="en-GB" sz="1400" dirty="0">
+                      <a:solidFill>
+                        <a:srgbClr val="0000FF"/>
+                      </a:solidFill>
+                    </a:rPr>
+                    <a:t>(temperature dependent) heat capacity</a:t>
+                  </a:r>
+                  <a:endParaRPr lang="LID4096" sz="1400" dirty="0">
+                    <a:solidFill>
+                      <a:srgbClr val="0000FF"/>
+                    </a:solidFill>
+                  </a:endParaRPr>
+                </a:p>
+              </p:txBody>
+            </p:sp>
+            <p:pic>
+              <p:nvPicPr>
+                <p:cNvPr id="9" name="Picture 8">
+                  <a:extLst>
+                    <a:ext uri="{FF2B5EF4-FFF2-40B4-BE49-F238E27FC236}">
+                      <a16:creationId xmlns:a16="http://schemas.microsoft.com/office/drawing/2014/main" id="{0233BAAB-ABE6-5897-4FB7-A0AF4988C8A9}"/>
+                    </a:ext>
+                  </a:extLst>
+                </p:cNvPr>
+                <p:cNvPicPr>
+                  <a:picLocks noChangeAspect="1"/>
+                </p:cNvPicPr>
+                <p:nvPr/>
+              </p:nvPicPr>
+              <p:blipFill>
+                <a:blip r:embed="rId5"/>
+                <a:srcRect t="18000" b="13963"/>
+                <a:stretch>
+                  <a:fillRect/>
+                </a:stretch>
+              </p:blipFill>
+              <p:spPr>
+                <a:xfrm>
+                  <a:off x="1738992" y="796115"/>
+                  <a:ext cx="1285875" cy="324024"/>
+                </a:xfrm>
+                <a:prstGeom prst="rect">
+                  <a:avLst/>
+                </a:prstGeom>
+              </p:spPr>
+            </p:pic>
+            <p:pic>
+              <p:nvPicPr>
+                <p:cNvPr id="11" name="Picture 10">
+                  <a:extLst>
+                    <a:ext uri="{FF2B5EF4-FFF2-40B4-BE49-F238E27FC236}">
+                      <a16:creationId xmlns:a16="http://schemas.microsoft.com/office/drawing/2014/main" id="{41D14760-1E87-0A6F-3873-6AD13A5FCCEF}"/>
+                    </a:ext>
+                  </a:extLst>
+                </p:cNvPr>
+                <p:cNvPicPr>
+                  <a:picLocks noChangeAspect="1"/>
+                </p:cNvPicPr>
+                <p:nvPr/>
+              </p:nvPicPr>
+              <p:blipFill>
+                <a:blip r:embed="rId6"/>
+                <a:stretch>
+                  <a:fillRect/>
+                </a:stretch>
+              </p:blipFill>
+              <p:spPr>
+                <a:xfrm>
+                  <a:off x="738051" y="997075"/>
+                  <a:ext cx="1009650" cy="390525"/>
+                </a:xfrm>
+                <a:prstGeom prst="rect">
+                  <a:avLst/>
+                </a:prstGeom>
+              </p:spPr>
+            </p:pic>
+            <p:grpSp>
+              <p:nvGrpSpPr>
+                <p:cNvPr id="24" name="Group 23">
+                  <a:extLst>
+                    <a:ext uri="{FF2B5EF4-FFF2-40B4-BE49-F238E27FC236}">
+                      <a16:creationId xmlns:a16="http://schemas.microsoft.com/office/drawing/2014/main" id="{42164C09-3E45-EAB5-94A0-D52A6CAFF7B3}"/>
+                    </a:ext>
+                  </a:extLst>
+                </p:cNvPr>
+                <p:cNvGrpSpPr/>
+                <p:nvPr/>
+              </p:nvGrpSpPr>
+              <p:grpSpPr>
+                <a:xfrm>
+                  <a:off x="771889" y="1561596"/>
+                  <a:ext cx="2848519" cy="476250"/>
+                  <a:chOff x="771889" y="1474509"/>
+                  <a:chExt cx="2848519" cy="476250"/>
+                </a:xfrm>
+              </p:grpSpPr>
+              <p:pic>
+                <p:nvPicPr>
+                  <p:cNvPr id="13" name="Picture 12">
+                    <a:extLst>
+                      <a:ext uri="{FF2B5EF4-FFF2-40B4-BE49-F238E27FC236}">
+                        <a16:creationId xmlns:a16="http://schemas.microsoft.com/office/drawing/2014/main" id="{03048724-9AC1-2634-3030-559A1647CEBB}"/>
+                      </a:ext>
+                    </a:extLst>
+                  </p:cNvPr>
+                  <p:cNvPicPr>
+                    <a:picLocks noChangeAspect="1"/>
+                  </p:cNvPicPr>
+                  <p:nvPr/>
+                </p:nvPicPr>
+                <p:blipFill>
+                  <a:blip r:embed="rId7"/>
+                  <a:srcRect t="-2041" r="20544"/>
+                  <a:stretch>
+                    <a:fillRect/>
+                  </a:stretch>
+                </p:blipFill>
+                <p:spPr>
+                  <a:xfrm>
+                    <a:off x="771889" y="1474509"/>
+                    <a:ext cx="2066108" cy="476250"/>
+                  </a:xfrm>
+                  <a:prstGeom prst="rect">
+                    <a:avLst/>
+                  </a:prstGeom>
+                </p:spPr>
+              </p:pic>
+              <p:pic>
+                <p:nvPicPr>
+                  <p:cNvPr id="16" name="Picture 15">
+                    <a:extLst>
+                      <a:ext uri="{FF2B5EF4-FFF2-40B4-BE49-F238E27FC236}">
+                        <a16:creationId xmlns:a16="http://schemas.microsoft.com/office/drawing/2014/main" id="{CAA6090C-5358-9B70-4C86-B31AA578B2F0}"/>
+                      </a:ext>
+                    </a:extLst>
+                  </p:cNvPr>
+                  <p:cNvPicPr>
+                    <a:picLocks noChangeAspect="1"/>
+                  </p:cNvPicPr>
+                  <p:nvPr/>
+                </p:nvPicPr>
+                <p:blipFill>
+                  <a:blip r:embed="rId7"/>
+                  <a:srcRect l="78954"/>
+                  <a:stretch>
+                    <a:fillRect/>
+                  </a:stretch>
+                </p:blipFill>
+                <p:spPr>
+                  <a:xfrm>
+                    <a:off x="3073129" y="1479271"/>
+                    <a:ext cx="547279" cy="466725"/>
+                  </a:xfrm>
+                  <a:prstGeom prst="rect">
+                    <a:avLst/>
+                  </a:prstGeom>
+                </p:spPr>
+              </p:pic>
+            </p:grpSp>
+            <p:pic>
+              <p:nvPicPr>
+                <p:cNvPr id="18" name="Picture 17">
+                  <a:extLst>
+                    <a:ext uri="{FF2B5EF4-FFF2-40B4-BE49-F238E27FC236}">
+                      <a16:creationId xmlns:a16="http://schemas.microsoft.com/office/drawing/2014/main" id="{7A8DCB8C-179F-7DC5-2651-1DB79A198442}"/>
+                    </a:ext>
+                  </a:extLst>
+                </p:cNvPr>
+                <p:cNvPicPr>
+                  <a:picLocks noChangeAspect="1"/>
+                </p:cNvPicPr>
+                <p:nvPr/>
+              </p:nvPicPr>
+              <p:blipFill>
+                <a:blip r:embed="rId3"/>
+                <a:srcRect t="1" b="49340"/>
+                <a:stretch>
+                  <a:fillRect/>
+                </a:stretch>
+              </p:blipFill>
+              <p:spPr>
+                <a:xfrm>
+                  <a:off x="1000980" y="2082468"/>
+                  <a:ext cx="4953000" cy="815459"/>
+                </a:xfrm>
+                <a:prstGeom prst="rect">
+                  <a:avLst/>
+                </a:prstGeom>
+              </p:spPr>
+            </p:pic>
+            <p:sp>
+              <p:nvSpPr>
+                <p:cNvPr id="27" name="Rectangle 26">
+                  <a:extLst>
+                    <a:ext uri="{FF2B5EF4-FFF2-40B4-BE49-F238E27FC236}">
+                      <a16:creationId xmlns:a16="http://schemas.microsoft.com/office/drawing/2014/main" id="{2752B941-3E23-0EEE-3C03-4FAF44369101}"/>
+                    </a:ext>
+                  </a:extLst>
+                </p:cNvPr>
+                <p:cNvSpPr/>
+                <p:nvPr/>
+              </p:nvSpPr>
+              <p:spPr>
+                <a:xfrm>
+                  <a:off x="676003" y="334423"/>
+                  <a:ext cx="2824842" cy="1182549"/>
+                </a:xfrm>
+                <a:prstGeom prst="rect">
+                  <a:avLst/>
+                </a:prstGeom>
+                <a:noFill/>
+                <a:ln>
+                  <a:solidFill>
+                    <a:schemeClr val="tx1"/>
+                  </a:solidFill>
+                </a:ln>
+              </p:spPr>
+              <p:style>
+                <a:lnRef idx="2">
+                  <a:schemeClr val="accent1">
+                    <a:shade val="15000"/>
+                  </a:schemeClr>
+                </a:lnRef>
+                <a:fillRef idx="1">
+                  <a:schemeClr val="accent1"/>
+                </a:fillRef>
+                <a:effectRef idx="0">
+                  <a:schemeClr val="accent1"/>
+                </a:effectRef>
+                <a:fontRef idx="minor">
+                  <a:schemeClr val="lt1"/>
+                </a:fontRef>
+              </p:style>
+              <p:txBody>
+                <a:bodyPr rtlCol="0" anchor="ctr"/>
+                <a:lstStyle/>
+                <a:p>
+                  <a:pPr algn="ctr"/>
+                  <a:endParaRPr lang="LID4096"/>
+                </a:p>
+              </p:txBody>
+            </p:sp>
+          </p:grpSp>
+        </p:grpSp>
+        <p:sp>
+          <p:nvSpPr>
+            <p:cNvPr id="4" name="TextBox 3">
+              <a:extLst>
+                <a:ext uri="{FF2B5EF4-FFF2-40B4-BE49-F238E27FC236}">
+                  <a16:creationId xmlns:a16="http://schemas.microsoft.com/office/drawing/2014/main" id="{01F3F83B-A6CA-28F1-E03A-7B349F665D43}"/>
+                </a:ext>
+              </a:extLst>
+            </p:cNvPr>
+            <p:cNvSpPr txBox="1"/>
+            <p:nvPr/>
+          </p:nvSpPr>
+          <p:spPr>
+            <a:xfrm>
+              <a:off x="7279369" y="4850526"/>
+              <a:ext cx="1219200" cy="307777"/>
+            </a:xfrm>
+            <a:prstGeom prst="rect">
+              <a:avLst/>
+            </a:prstGeom>
+            <a:noFill/>
+          </p:spPr>
+          <p:txBody>
+            <a:bodyPr wrap="square">
+              <a:spAutoFit/>
+            </a:bodyPr>
+            <a:lstStyle/>
+            <a:p>
+              <a:r>
+                <a:rPr lang="LID4096" sz="1400" dirty="0">
+                  <a:solidFill>
+                    <a:srgbClr val="0000FF"/>
+                  </a:solidFill>
+                </a:rPr>
+                <a:t>heat losses</a:t>
+              </a:r>
+            </a:p>
+          </p:txBody>
+        </p:sp>
+        <p:sp>
+          <p:nvSpPr>
+            <p:cNvPr id="6" name="TextBox 5">
+              <a:extLst>
+                <a:ext uri="{FF2B5EF4-FFF2-40B4-BE49-F238E27FC236}">
+                  <a16:creationId xmlns:a16="http://schemas.microsoft.com/office/drawing/2014/main" id="{9A3E7AF0-73B5-4CC6-9427-4896A57CAA4B}"/>
+                </a:ext>
+              </a:extLst>
+            </p:cNvPr>
+            <p:cNvSpPr txBox="1"/>
+            <p:nvPr/>
+          </p:nvSpPr>
+          <p:spPr>
+            <a:xfrm>
+              <a:off x="8695802" y="4857820"/>
+              <a:ext cx="2752794" cy="307777"/>
+            </a:xfrm>
+            <a:prstGeom prst="rect">
+              <a:avLst/>
+            </a:prstGeom>
+            <a:noFill/>
+          </p:spPr>
+          <p:txBody>
+            <a:bodyPr wrap="square">
+              <a:spAutoFit/>
+            </a:bodyPr>
+            <a:lstStyle>
+              <a:defPPr>
+                <a:defRPr lang="LID4096"/>
+              </a:defPPr>
+              <a:lvl1pPr>
+                <a:defRPr>
+                  <a:solidFill>
+                    <a:srgbClr val="0000FF"/>
+                  </a:solidFill>
+                </a:defRPr>
+              </a:lvl1pPr>
+            </a:lstStyle>
+            <a:p>
+              <a:r>
+                <a:rPr lang="LID4096" sz="1400" dirty="0"/>
+                <a:t>external work of the thermal loads</a:t>
+              </a:r>
+            </a:p>
+          </p:txBody>
+        </p:sp>
+      </p:grpSp>
+    </p:spTree>
+    <p:extLst>
+      <p:ext uri="{BB962C8B-B14F-4D97-AF65-F5344CB8AC3E}">
+        <p14:creationId xmlns:p14="http://schemas.microsoft.com/office/powerpoint/2010/main" val="872693095"/>
+      </p:ext>
+    </p:extLst>
+  </p:cSld>
+  <p:clrMapOvr>
+    <a:masterClrMapping/>
+  </p:clrMapOvr>
+</p:sld>
+</file>
+
+<file path=ppt/slides/slide11.xml><?xml version="1.0" encoding="utf-8"?>
 <p:sld xmlns:a="http://schemas.openxmlformats.org/drawingml/2006/main" xmlns:r="http://schemas.openxmlformats.org/officeDocument/2006/relationships" xmlns:p="http://schemas.openxmlformats.org/presentationml/2006/main">
   <p:cSld>
     <p:spTree>
@@ -4731,7 +5647,7 @@
 </p:sld>
 </file>
 
-<file path=ppt/slides/slide11.xml><?xml version="1.0" encoding="utf-8"?>
+<file path=ppt/slides/slide12.xml><?xml version="1.0" encoding="utf-8"?>
 <p:sld xmlns:a="http://schemas.openxmlformats.org/drawingml/2006/main" xmlns:r="http://schemas.openxmlformats.org/officeDocument/2006/relationships" xmlns:p="http://schemas.openxmlformats.org/presentationml/2006/main">
   <p:cSld>
     <p:spTree>
@@ -4831,8 +5747,8 @@
         </p:nvSpPr>
         <p:spPr>
           <a:xfrm>
-            <a:off x="1473302" y="2227694"/>
-            <a:ext cx="7733922" cy="646331"/>
+            <a:off x="8133804" y="5179900"/>
+            <a:ext cx="3485693" cy="923330"/>
           </a:xfrm>
           <a:prstGeom prst="rect">
             <a:avLst/>
@@ -4874,9 +5790,9 @@
         <p:grpSpPr>
           <a:xfrm>
             <a:off x="199480" y="333784"/>
-            <a:ext cx="3305981" cy="1708802"/>
+            <a:ext cx="4468314" cy="3410902"/>
             <a:chOff x="199480" y="333784"/>
-            <a:chExt cx="3305981" cy="1708802"/>
+            <a:chExt cx="2629506" cy="1708802"/>
           </a:xfrm>
         </p:grpSpPr>
         <p:pic>
@@ -4902,7 +5818,7 @@
           <p:spPr>
             <a:xfrm>
               <a:off x="199480" y="333784"/>
-              <a:ext cx="2181581" cy="1708802"/>
+              <a:ext cx="2629506" cy="1708802"/>
             </a:xfrm>
             <a:prstGeom prst="rect">
               <a:avLst/>
@@ -4923,8 +5839,8 @@
           </p:nvSpPr>
           <p:spPr>
             <a:xfrm>
-              <a:off x="1733550" y="1145127"/>
-              <a:ext cx="1771911" cy="338554"/>
+              <a:off x="1846296" y="1136401"/>
+              <a:ext cx="352339" cy="169610"/>
             </a:xfrm>
             <a:prstGeom prst="rect">
               <a:avLst/>
@@ -4974,7 +5890,7 @@
 </p:sld>
 </file>
 
-<file path=ppt/slides/slide12.xml><?xml version="1.0" encoding="utf-8"?>
+<file path=ppt/slides/slide13.xml><?xml version="1.0" encoding="utf-8"?>
 <p:sld xmlns:a="http://schemas.openxmlformats.org/drawingml/2006/main" xmlns:r="http://schemas.openxmlformats.org/officeDocument/2006/relationships" xmlns:p="http://schemas.openxmlformats.org/presentationml/2006/main">
   <p:cSld>
     <p:spTree>
@@ -5962,7 +6878,7 @@
 </p:sld>
 </file>
 
-<file path=ppt/slides/slide13.xml><?xml version="1.0" encoding="utf-8"?>
+<file path=ppt/slides/slide14.xml><?xml version="1.0" encoding="utf-8"?>
 <p:sld xmlns:a="http://schemas.openxmlformats.org/drawingml/2006/main" xmlns:r="http://schemas.openxmlformats.org/officeDocument/2006/relationships" xmlns:p="http://schemas.openxmlformats.org/presentationml/2006/main">
   <p:cSld>
     <p:spTree>
@@ -11234,8 +12150,8 @@
         </p:nvSpPr>
         <p:spPr>
           <a:xfrm>
-            <a:off x="233803" y="651479"/>
-            <a:ext cx="1559713" cy="555335"/>
+            <a:off x="233803" y="483270"/>
+            <a:ext cx="1559713" cy="889008"/>
           </a:xfrm>
           <a:prstGeom prst="roundRect">
             <a:avLst/>
@@ -11247,6 +12163,25 @@
             <a:noAutofit/>
           </a:bodyPr>
           <a:lstStyle/>
+          <a:p>
+            <a:pPr algn="ctr"/>
+            <a:r>
+              <a:rPr lang="pt-BR" sz="2400" b="1" dirty="0">
+                <a:solidFill>
+                  <a:srgbClr val="0000FF"/>
+                </a:solidFill>
+                <a:effectLst>
+                  <a:outerShdw blurRad="38100" dist="38100" dir="2700000" algn="tl">
+                    <a:srgbClr val="000000">
+                      <a:alpha val="43137"/>
+                    </a:srgbClr>
+                  </a:outerShdw>
+                </a:effectLst>
+                <a:latin typeface="Horley Old Style MT"/>
+              </a:rPr>
+              <a:t>Laser</a:t>
+            </a:r>
+          </a:p>
           <a:p>
             <a:pPr algn="ctr"/>
             <a:r>
@@ -11295,7 +12230,39 @@
                 </a:effectLst>
                 <a:latin typeface="Horley Old Style MT"/>
               </a:rPr>
-              <a:t>Bed Fusion (PBF)</a:t>
+              <a:t>Bed Fusion (</a:t>
+            </a:r>
+            <a:r>
+              <a:rPr lang="pt-BR" sz="2400" b="1" dirty="0">
+                <a:solidFill>
+                  <a:srgbClr val="0000FF"/>
+                </a:solidFill>
+                <a:effectLst>
+                  <a:outerShdw blurRad="38100" dist="38100" dir="2700000" algn="tl">
+                    <a:srgbClr val="000000">
+                      <a:alpha val="43137"/>
+                    </a:srgbClr>
+                  </a:outerShdw>
+                </a:effectLst>
+                <a:latin typeface="Horley Old Style MT"/>
+              </a:rPr>
+              <a:t>L </a:t>
+            </a:r>
+            <a:r>
+              <a:rPr lang="LID4096" sz="2400" b="1" dirty="0">
+                <a:solidFill>
+                  <a:srgbClr val="0000FF"/>
+                </a:solidFill>
+                <a:effectLst>
+                  <a:outerShdw blurRad="38100" dist="38100" dir="2700000" algn="tl">
+                    <a:srgbClr val="000000">
+                      <a:alpha val="43137"/>
+                    </a:srgbClr>
+                  </a:outerShdw>
+                </a:effectLst>
+                <a:latin typeface="Horley Old Style MT"/>
+              </a:rPr>
+              <a:t>PBF)</a:t>
             </a:r>
           </a:p>
         </p:txBody>
@@ -11612,10 +12579,10 @@
               <a:t> for temperature distribution in fillet arc welding based on an adaptive function </a:t>
             </a:r>
             <a:r>
-              <a:rPr lang="en-US" sz="1100" dirty="0"/>
+              <a:rPr lang="en-US" sz="1100" b="1" u="sng" dirty="0"/>
               <a:t>Nasiri &amp; Enzinger - 2018</a:t>
             </a:r>
-            <a:endParaRPr lang="LID4096" sz="1200" dirty="0"/>
+            <a:endParaRPr lang="LID4096" sz="1200" b="1" u="sng" dirty="0"/>
           </a:p>
         </p:txBody>
       </p:sp>
@@ -11704,65 +12671,6 @@
           </a:effectLst>
         </p:spPr>
       </p:pic>
-      <p:sp>
-        <p:nvSpPr>
-          <p:cNvPr id="6" name="TextBox 5">
-            <a:extLst>
-              <a:ext uri="{FF2B5EF4-FFF2-40B4-BE49-F238E27FC236}">
-                <a16:creationId xmlns:a16="http://schemas.microsoft.com/office/drawing/2014/main" id="{8D6251A2-D638-571D-DCE9-8C044896874B}"/>
-              </a:ext>
-            </a:extLst>
-          </p:cNvPr>
-          <p:cNvSpPr txBox="1"/>
-          <p:nvPr/>
-        </p:nvSpPr>
-        <p:spPr>
-          <a:xfrm>
-            <a:off x="278962" y="442808"/>
-            <a:ext cx="1391772" cy="954107"/>
-          </a:xfrm>
-          <a:prstGeom prst="rect">
-            <a:avLst/>
-          </a:prstGeom>
-          <a:noFill/>
-        </p:spPr>
-        <p:txBody>
-          <a:bodyPr wrap="square">
-            <a:spAutoFit/>
-          </a:bodyPr>
-          <a:lstStyle/>
-          <a:p>
-            <a:pPr algn="ctr"/>
-            <a:r>
-              <a:rPr lang="en-GB" sz="2800" b="1" dirty="0">
-                <a:solidFill>
-                  <a:srgbClr val="0000FF"/>
-                </a:solidFill>
-                <a:effectLst>
-                  <a:outerShdw blurRad="38100" dist="38100" dir="2700000" algn="tl">
-                    <a:srgbClr val="000000">
-                      <a:alpha val="43137"/>
-                    </a:srgbClr>
-                  </a:outerShdw>
-                </a:effectLst>
-              </a:rPr>
-              <a:t>Wire DED</a:t>
-            </a:r>
-            <a:endParaRPr lang="en-GB" sz="2800" dirty="0">
-              <a:solidFill>
-                <a:srgbClr val="0000FF"/>
-              </a:solidFill>
-              <a:effectLst>
-                <a:outerShdw blurRad="38100" dist="38100" dir="2700000" algn="tl">
-                  <a:srgbClr val="000000">
-                    <a:alpha val="43137"/>
-                  </a:srgbClr>
-                </a:outerShdw>
-              </a:effectLst>
-            </a:endParaRPr>
-          </a:p>
-        </p:txBody>
-      </p:sp>
       <p:pic>
         <p:nvPicPr>
           <p:cNvPr id="13" name="Picture 12">
@@ -11820,8 +12728,8 @@
         </p:nvSpPr>
         <p:spPr>
           <a:xfrm>
-            <a:off x="7010400" y="238860"/>
-            <a:ext cx="4702629" cy="307777"/>
+            <a:off x="6404278" y="238860"/>
+            <a:ext cx="5308751" cy="338554"/>
           </a:xfrm>
           <a:prstGeom prst="rect">
             <a:avLst/>
@@ -11836,13 +12744,22 @@
           <a:p>
             <a:pPr algn="r"/>
             <a:r>
-              <a:rPr lang="en-GB" sz="1400" b="1" i="0" u="sng" strike="noStrike" baseline="0" dirty="0">
+              <a:rPr lang="en-GB" sz="1400" i="0" strike="noStrike" baseline="0" dirty="0">
                 <a:solidFill>
                   <a:srgbClr val="000000"/>
                 </a:solidFill>
                 <a:latin typeface="Calibri (Body)"/>
               </a:rPr>
-              <a:t> Modelling of wire-arc</a:t>
+              <a:t> Modelling of </a:t>
+            </a:r>
+            <a:r>
+              <a:rPr lang="en-GB" sz="1600" b="1" i="0" u="sng" strike="noStrike" baseline="0" dirty="0">
+                <a:solidFill>
+                  <a:srgbClr val="000000"/>
+                </a:solidFill>
+                <a:latin typeface="Calibri (Body)"/>
+              </a:rPr>
+              <a:t>wire-arc</a:t>
             </a:r>
             <a:r>
               <a:rPr lang="en-GB" sz="1100" b="0" i="0" u="none" strike="noStrike" baseline="0" dirty="0">
@@ -11855,6 +12772,131 @@
             </a:r>
             <a:endParaRPr lang="LID4096" sz="1100" dirty="0">
               <a:latin typeface="Calibri (Body)"/>
+            </a:endParaRPr>
+          </a:p>
+        </p:txBody>
+      </p:sp>
+      <p:sp>
+        <p:nvSpPr>
+          <p:cNvPr id="3" name="TextBox 2">
+            <a:extLst>
+              <a:ext uri="{FF2B5EF4-FFF2-40B4-BE49-F238E27FC236}">
+                <a16:creationId xmlns:a16="http://schemas.microsoft.com/office/drawing/2014/main" id="{FC2E041E-DB1A-FD73-5F21-E0769B99D6B5}"/>
+              </a:ext>
+            </a:extLst>
+          </p:cNvPr>
+          <p:cNvSpPr txBox="1"/>
+          <p:nvPr/>
+        </p:nvSpPr>
+        <p:spPr>
+          <a:xfrm>
+            <a:off x="8452348" y="1233226"/>
+            <a:ext cx="1771911" cy="338554"/>
+          </a:xfrm>
+          <a:prstGeom prst="rect">
+            <a:avLst/>
+          </a:prstGeom>
+          <a:noFill/>
+        </p:spPr>
+        <p:txBody>
+          <a:bodyPr wrap="square" rtlCol="0">
+            <a:spAutoFit/>
+          </a:bodyPr>
+          <a:lstStyle>
+            <a:defPPr>
+              <a:defRPr lang="LID4096"/>
+            </a:defPPr>
+            <a:lvl1pPr>
+              <a:defRPr sz="1050" b="1">
+                <a:solidFill>
+                  <a:srgbClr val="0000FF"/>
+                </a:solidFill>
+              </a:defRPr>
+            </a:lvl1pPr>
+          </a:lstStyle>
+          <a:p>
+            <a:r>
+              <a:rPr lang="en-GB" sz="1600" noProof="0" dirty="0"/>
+              <a:t>Diffusion</a:t>
+            </a:r>
+            <a:endParaRPr lang="en-GB" sz="2400" noProof="0" dirty="0">
+              <a:solidFill>
+                <a:srgbClr val="FF0000"/>
+              </a:solidFill>
+            </a:endParaRPr>
+          </a:p>
+        </p:txBody>
+      </p:sp>
+      <p:sp>
+        <p:nvSpPr>
+          <p:cNvPr id="4" name="TextBox 3">
+            <a:extLst>
+              <a:ext uri="{FF2B5EF4-FFF2-40B4-BE49-F238E27FC236}">
+                <a16:creationId xmlns:a16="http://schemas.microsoft.com/office/drawing/2014/main" id="{8D6251A2-D638-571D-DCE9-8C044896874B}"/>
+              </a:ext>
+            </a:extLst>
+          </p:cNvPr>
+          <p:cNvSpPr txBox="1"/>
+          <p:nvPr/>
+        </p:nvSpPr>
+        <p:spPr>
+          <a:xfrm>
+            <a:off x="296380" y="468936"/>
+            <a:ext cx="1391772" cy="954107"/>
+          </a:xfrm>
+          <a:prstGeom prst="rect">
+            <a:avLst/>
+          </a:prstGeom>
+          <a:noFill/>
+        </p:spPr>
+        <p:txBody>
+          <a:bodyPr wrap="square">
+            <a:spAutoFit/>
+          </a:bodyPr>
+          <a:lstStyle/>
+          <a:p>
+            <a:pPr algn="ctr"/>
+            <a:r>
+              <a:rPr lang="en-GB" sz="2800" b="1" u="sng" dirty="0">
+                <a:solidFill>
+                  <a:srgbClr val="0000FF"/>
+                </a:solidFill>
+                <a:effectLst>
+                  <a:outerShdw blurRad="38100" dist="38100" dir="2700000" algn="tl">
+                    <a:srgbClr val="000000">
+                      <a:alpha val="43137"/>
+                    </a:srgbClr>
+                  </a:outerShdw>
+                </a:effectLst>
+              </a:rPr>
+              <a:t>Wire</a:t>
+            </a:r>
+            <a:r>
+              <a:rPr lang="en-GB" sz="2800" b="1" dirty="0">
+                <a:solidFill>
+                  <a:srgbClr val="0000FF"/>
+                </a:solidFill>
+                <a:effectLst>
+                  <a:outerShdw blurRad="38100" dist="38100" dir="2700000" algn="tl">
+                    <a:srgbClr val="000000">
+                      <a:alpha val="43137"/>
+                    </a:srgbClr>
+                  </a:outerShdw>
+                </a:effectLst>
+              </a:rPr>
+              <a:t> DED</a:t>
+            </a:r>
+            <a:endParaRPr lang="en-GB" sz="2800" dirty="0">
+              <a:solidFill>
+                <a:srgbClr val="0000FF"/>
+              </a:solidFill>
+              <a:effectLst>
+                <a:outerShdw blurRad="38100" dist="38100" dir="2700000" algn="tl">
+                  <a:srgbClr val="000000">
+                    <a:alpha val="43137"/>
+                  </a:srgbClr>
+                </a:outerShdw>
+              </a:effectLst>
             </a:endParaRPr>
           </a:p>
         </p:txBody>
@@ -11891,10 +12933,10 @@
       </p:grpSpPr>
       <p:sp>
         <p:nvSpPr>
-          <p:cNvPr id="29" name="TextBox 28">
-            <a:extLst>
-              <a:ext uri="{FF2B5EF4-FFF2-40B4-BE49-F238E27FC236}">
-                <a16:creationId xmlns:a16="http://schemas.microsoft.com/office/drawing/2014/main" id="{383AFA05-AE80-CBF4-788E-F2994CD23B67}"/>
+          <p:cNvPr id="5" name="TextBox 4">
+            <a:extLst>
+              <a:ext uri="{FF2B5EF4-FFF2-40B4-BE49-F238E27FC236}">
+                <a16:creationId xmlns:a16="http://schemas.microsoft.com/office/drawing/2014/main" id="{919D5A93-641C-ED55-E5B0-9FA35FCBAEB8}"/>
               </a:ext>
             </a:extLst>
           </p:cNvPr>
@@ -11903,8 +12945,8 @@
         </p:nvSpPr>
         <p:spPr>
           <a:xfrm>
-            <a:off x="11700" y="5600247"/>
-            <a:ext cx="6096000" cy="1261884"/>
+            <a:off x="322218" y="174899"/>
+            <a:ext cx="6096000" cy="400110"/>
           </a:xfrm>
           <a:prstGeom prst="rect">
             <a:avLst/>
@@ -11918,174 +12960,24 @@
           <a:lstStyle/>
           <a:p>
             <a:r>
-              <a:rPr lang="en-US" sz="1600" b="1" i="0" u="sng" strike="noStrike" baseline="0" dirty="0">
-                <a:latin typeface="MyriadPro-SemiboldSemiCn"/>
+              <a:rPr lang="en-GB" sz="2000" b="1" i="0" u="none" strike="noStrike" baseline="0" dirty="0">
+                <a:solidFill>
+                  <a:srgbClr val="000000"/>
+                </a:solidFill>
+                <a:latin typeface="Charis SIL"/>
               </a:rPr>
-              <a:t>A multi‑criteria </a:t>
-            </a:r>
-            <a:r>
-              <a:rPr lang="en-US" sz="1600" b="1" i="1" u="sng" strike="noStrike" baseline="0" dirty="0">
-                <a:latin typeface="MyriadPro-SemiboldSemiCnIt"/>
-              </a:rPr>
-              <a:t>h</a:t>
-            </a:r>
-            <a:r>
-              <a:rPr lang="en-US" sz="1600" b="1" i="0" u="sng" strike="noStrike" baseline="0" dirty="0">
-                <a:latin typeface="MyriadPro-SemiboldSemiCn"/>
-              </a:rPr>
-              <a:t>‑adaptive finite‑element framework</a:t>
-            </a:r>
-            <a:r>
-              <a:rPr lang="en-US" sz="1200" b="0" i="0" u="none" strike="noStrike" baseline="0" dirty="0">
-                <a:latin typeface="MyriadPro-SemiboldSemiCn"/>
-              </a:rPr>
-              <a:t> for industrial </a:t>
-            </a:r>
-            <a:r>
-              <a:rPr lang="en-GB" sz="1200" b="0" i="0" u="none" strike="noStrike" baseline="0" dirty="0">
-                <a:latin typeface="MyriadPro-SemiboldSemiCn"/>
-              </a:rPr>
-              <a:t>part‑scale thermal analysis in additive manufacturing processes – </a:t>
-            </a:r>
-            <a:r>
-              <a:rPr lang="en-US" sz="1200" dirty="0"/>
-              <a:t>Moreira &amp; </a:t>
-            </a:r>
-            <a:r>
-              <a:rPr lang="en-US" sz="1200" dirty="0" err="1"/>
-              <a:t>Chiumenti</a:t>
-            </a:r>
-            <a:r>
-              <a:rPr lang="en-US" sz="1200" dirty="0"/>
-              <a:t> (2021)</a:t>
-            </a:r>
-          </a:p>
-          <a:p>
-            <a:endParaRPr lang="en-US" sz="1200" dirty="0"/>
-          </a:p>
-          <a:p>
-            <a:r>
-              <a:rPr lang="en-GB" sz="1200" dirty="0"/>
-              <a:t>Numerical simulation and experimental calibration of Additive Manufacturing by blown powder technology. </a:t>
-            </a:r>
-            <a:r>
-              <a:rPr lang="en-US" sz="1200" dirty="0"/>
-              <a:t>Part I: thermal analysis -- M. </a:t>
-            </a:r>
-            <a:r>
-              <a:rPr lang="en-US" sz="1200" dirty="0" err="1"/>
-              <a:t>Chiumenti</a:t>
-            </a:r>
-            <a:endParaRPr lang="en-US" sz="1200" dirty="0"/>
-          </a:p>
-          <a:p>
-            <a:r>
-              <a:rPr lang="en-GB" sz="1000" dirty="0"/>
-              <a:t>01c Residual stress and distortion of rectangular and S-shaped Ti-6Al-4V parts </a:t>
-            </a:r>
-            <a:r>
-              <a:rPr lang="en-US" sz="1000" dirty="0"/>
-              <a:t>-- M. </a:t>
-            </a:r>
-            <a:r>
-              <a:rPr lang="en-US" sz="1000" dirty="0" err="1"/>
-              <a:t>Chiumenti</a:t>
-            </a:r>
-            <a:endParaRPr lang="LID4096" sz="1000" dirty="0"/>
-          </a:p>
-        </p:txBody>
-      </p:sp>
-      <p:sp>
-        <p:nvSpPr>
-          <p:cNvPr id="32" name="TextBox 31">
-            <a:extLst>
-              <a:ext uri="{FF2B5EF4-FFF2-40B4-BE49-F238E27FC236}">
-                <a16:creationId xmlns:a16="http://schemas.microsoft.com/office/drawing/2014/main" id="{F2B78473-A7F0-914B-C99C-1BF327B3FDA8}"/>
-              </a:ext>
-            </a:extLst>
-          </p:cNvPr>
-          <p:cNvSpPr txBox="1"/>
-          <p:nvPr/>
-        </p:nvSpPr>
-        <p:spPr>
-          <a:xfrm>
-            <a:off x="329839" y="494409"/>
-            <a:ext cx="5664926" cy="954107"/>
-          </a:xfrm>
-          <a:prstGeom prst="rect">
-            <a:avLst/>
-          </a:prstGeom>
-          <a:noFill/>
-        </p:spPr>
-        <p:txBody>
-          <a:bodyPr wrap="square">
-            <a:spAutoFit/>
-          </a:bodyPr>
-          <a:lstStyle/>
-          <a:p>
-            <a:pPr marL="342900" indent="-342900">
-              <a:buFont typeface="Wingdings" panose="05000000000000000000" pitchFamily="2" charset="2"/>
-              <a:buChar char="Ø"/>
-            </a:pPr>
-            <a:r>
-              <a:rPr lang="en-US" sz="2000" b="1" dirty="0"/>
-              <a:t>h-adaptive finite-element (FE) strategy</a:t>
-            </a:r>
-          </a:p>
-          <a:p>
-            <a:pPr marL="800100" lvl="1" indent="-342900">
-              <a:buFont typeface="Wingdings" panose="05000000000000000000" pitchFamily="2" charset="2"/>
-              <a:buChar char="Ø"/>
-            </a:pPr>
-            <a:r>
-              <a:rPr lang="en-US" b="1" dirty="0"/>
-              <a:t>mesh coarsening and refinement</a:t>
-            </a:r>
-            <a:endParaRPr lang="en-US" sz="2000" b="1" dirty="0"/>
-          </a:p>
-          <a:p>
-            <a:pPr marL="342900" indent="-342900">
-              <a:buFont typeface="Wingdings" panose="05000000000000000000" pitchFamily="2" charset="2"/>
-              <a:buChar char="Ø"/>
-            </a:pPr>
-            <a:r>
-              <a:rPr lang="en-US" b="1" dirty="0">
-                <a:solidFill>
-                  <a:srgbClr val="FF0000"/>
-                </a:solidFill>
-              </a:rPr>
-              <a:t>common layer interface (CLI)  </a:t>
-            </a:r>
-            <a:r>
-              <a:rPr lang="en-US" b="1" dirty="0">
-                <a:solidFill>
-                  <a:srgbClr val="0000FF"/>
-                </a:solidFill>
-              </a:rPr>
-              <a:t>x </a:t>
-            </a:r>
-            <a:r>
-              <a:rPr lang="en-US" b="1" dirty="0" err="1">
-                <a:solidFill>
-                  <a:srgbClr val="0000FF"/>
-                </a:solidFill>
-              </a:rPr>
-              <a:t>GCode</a:t>
-            </a:r>
-            <a:endParaRPr lang="LID4096" b="1" dirty="0">
-              <a:solidFill>
-                <a:srgbClr val="0000FF"/>
-              </a:solidFill>
-            </a:endParaRPr>
+              <a:t>Heat Affected Zone (HAZ)</a:t>
+            </a:r>
+            <a:endParaRPr lang="LID4096" sz="5400" b="1" dirty="0"/>
           </a:p>
         </p:txBody>
       </p:sp>
       <p:pic>
         <p:nvPicPr>
-          <p:cNvPr id="37" name="Picture 36">
-            <a:extLst>
-              <a:ext uri="{FF2B5EF4-FFF2-40B4-BE49-F238E27FC236}">
-                <a16:creationId xmlns:a16="http://schemas.microsoft.com/office/drawing/2014/main" id="{BD4AE64D-142C-C5A6-6B1E-B80609B23FE4}"/>
+          <p:cNvPr id="7" name="Picture 6">
+            <a:extLst>
+              <a:ext uri="{FF2B5EF4-FFF2-40B4-BE49-F238E27FC236}">
+                <a16:creationId xmlns:a16="http://schemas.microsoft.com/office/drawing/2014/main" id="{CA99D9C9-9B3A-C2E2-304D-58E8755D1B56}"/>
               </a:ext>
             </a:extLst>
           </p:cNvPr>
@@ -12096,38 +12988,27 @@
         </p:nvPicPr>
         <p:blipFill>
           <a:blip r:embed="rId2"/>
+          <a:srcRect l="36027" t="14307" r="35724" b="19738"/>
           <a:stretch>
             <a:fillRect/>
           </a:stretch>
         </p:blipFill>
         <p:spPr>
           <a:xfrm>
-            <a:off x="303964" y="1610723"/>
-            <a:ext cx="5128574" cy="3646380"/>
+            <a:off x="426722" y="557238"/>
+            <a:ext cx="1207572" cy="2168434"/>
           </a:xfrm>
           <a:prstGeom prst="rect">
             <a:avLst/>
           </a:prstGeom>
-          <a:ln>
-            <a:solidFill>
-              <a:schemeClr val="tx1"/>
-            </a:solidFill>
-          </a:ln>
-          <a:effectLst>
-            <a:outerShdw blurRad="50800" dist="38100" dir="8100000" algn="tr" rotWithShape="0">
-              <a:prstClr val="black">
-                <a:alpha val="40000"/>
-              </a:prstClr>
-            </a:outerShdw>
-          </a:effectLst>
         </p:spPr>
       </p:pic>
       <p:sp>
         <p:nvSpPr>
-          <p:cNvPr id="38" name="TextBox 37">
-            <a:extLst>
-              <a:ext uri="{FF2B5EF4-FFF2-40B4-BE49-F238E27FC236}">
-                <a16:creationId xmlns:a16="http://schemas.microsoft.com/office/drawing/2014/main" id="{01F3F83B-A6CA-28F1-E03A-7B349F665D43}"/>
+          <p:cNvPr id="9" name="TextBox 8">
+            <a:extLst>
+              <a:ext uri="{FF2B5EF4-FFF2-40B4-BE49-F238E27FC236}">
+                <a16:creationId xmlns:a16="http://schemas.microsoft.com/office/drawing/2014/main" id="{7C7F73E3-2BEF-B067-FE2A-2954DDD86B8D}"/>
               </a:ext>
             </a:extLst>
           </p:cNvPr>
@@ -12136,47 +13017,8 @@
         </p:nvSpPr>
         <p:spPr>
           <a:xfrm>
-            <a:off x="5842658" y="4858646"/>
-            <a:ext cx="1219200" cy="307777"/>
-          </a:xfrm>
-          <a:prstGeom prst="rect">
-            <a:avLst/>
-          </a:prstGeom>
-          <a:noFill/>
-        </p:spPr>
-        <p:txBody>
-          <a:bodyPr wrap="square">
-            <a:spAutoFit/>
-          </a:bodyPr>
-          <a:lstStyle/>
-          <a:p>
-            <a:r>
-              <a:rPr lang="LID4096" sz="1400" dirty="0">
-                <a:solidFill>
-                  <a:srgbClr val="0000FF"/>
-                </a:solidFill>
-              </a:rPr>
-              <a:t>heat losses</a:t>
-            </a:r>
-          </a:p>
-        </p:txBody>
-      </p:sp>
-      <p:sp>
-        <p:nvSpPr>
-          <p:cNvPr id="39" name="TextBox 38">
-            <a:extLst>
-              <a:ext uri="{FF2B5EF4-FFF2-40B4-BE49-F238E27FC236}">
-                <a16:creationId xmlns:a16="http://schemas.microsoft.com/office/drawing/2014/main" id="{9A3E7AF0-73B5-4CC6-9427-4896A57CAA4B}"/>
-              </a:ext>
-            </a:extLst>
-          </p:cNvPr>
-          <p:cNvSpPr txBox="1"/>
-          <p:nvPr/>
-        </p:nvSpPr>
-        <p:spPr>
-          <a:xfrm>
-            <a:off x="7145880" y="4857820"/>
-            <a:ext cx="2752794" cy="307777"/>
+            <a:off x="1706880" y="557238"/>
+            <a:ext cx="1863634" cy="400110"/>
           </a:xfrm>
           <a:prstGeom prst="rect">
             <a:avLst/>
@@ -12192,467 +13034,584 @@
               <a:defRPr lang="LID4096"/>
             </a:defPPr>
             <a:lvl1pPr>
-              <a:defRPr>
+              <a:defRPr sz="2000" b="1" i="0" u="none" strike="noStrike" baseline="0">
+                <a:solidFill>
+                  <a:srgbClr val="000000"/>
+                </a:solidFill>
+                <a:latin typeface="Charis SIL"/>
+              </a:defRPr>
+            </a:lvl1pPr>
+          </a:lstStyle>
+          <a:p>
+            <a:r>
+              <a:rPr lang="LID4096" dirty="0"/>
+              <a:t>phase change</a:t>
+            </a:r>
+          </a:p>
+        </p:txBody>
+      </p:sp>
+      <p:sp>
+        <p:nvSpPr>
+          <p:cNvPr id="11" name="TextBox 10">
+            <a:extLst>
+              <a:ext uri="{FF2B5EF4-FFF2-40B4-BE49-F238E27FC236}">
+                <a16:creationId xmlns:a16="http://schemas.microsoft.com/office/drawing/2014/main" id="{356D3E41-9434-80D6-4E99-7BB9A2B55FCD}"/>
+              </a:ext>
+            </a:extLst>
+          </p:cNvPr>
+          <p:cNvSpPr txBox="1"/>
+          <p:nvPr/>
+        </p:nvSpPr>
+        <p:spPr>
+          <a:xfrm>
+            <a:off x="1706880" y="1525343"/>
+            <a:ext cx="4389120" cy="1200329"/>
+          </a:xfrm>
+          <a:prstGeom prst="rect">
+            <a:avLst/>
+          </a:prstGeom>
+          <a:noFill/>
+        </p:spPr>
+        <p:txBody>
+          <a:bodyPr wrap="square">
+            <a:spAutoFit/>
+          </a:bodyPr>
+          <a:lstStyle/>
+          <a:p>
+            <a:r>
+              <a:rPr lang="en-GB" sz="2400" b="1" i="0" u="none" strike="noStrike" baseline="0" dirty="0">
+                <a:solidFill>
+                  <a:srgbClr val="000000"/>
+                </a:solidFill>
+                <a:latin typeface="Charis SIL"/>
+              </a:rPr>
+              <a:t>the balance of energy equation</a:t>
+            </a:r>
+          </a:p>
+          <a:p>
+            <a:r>
+              <a:rPr lang="en-GB" sz="2400" b="1" dirty="0">
+                <a:solidFill>
+                  <a:srgbClr val="000000"/>
+                </a:solidFill>
+                <a:latin typeface="Charis SIL"/>
+              </a:rPr>
+              <a:t>    + </a:t>
+            </a:r>
+            <a:r>
+              <a:rPr lang="en-GB" sz="2400" b="1" i="0" u="none" strike="noStrike" baseline="0" dirty="0">
+                <a:solidFill>
+                  <a:srgbClr val="000000"/>
+                </a:solidFill>
+                <a:latin typeface="Charis SIL"/>
+              </a:rPr>
+              <a:t>phase change </a:t>
+            </a:r>
+          </a:p>
+          <a:p>
+            <a:r>
+              <a:rPr lang="en-GB" sz="2400" b="1" dirty="0">
+                <a:solidFill>
+                  <a:srgbClr val="000000"/>
+                </a:solidFill>
+                <a:latin typeface="Charis SIL"/>
+              </a:rPr>
+              <a:t>    + </a:t>
+            </a:r>
+            <a:r>
+              <a:rPr lang="en-GB" sz="2400" b="1" i="0" u="none" strike="noStrike" baseline="0" dirty="0">
+                <a:solidFill>
+                  <a:srgbClr val="000000"/>
+                </a:solidFill>
+                <a:latin typeface="Charis SIL"/>
+              </a:rPr>
+              <a:t>growing domain</a:t>
+            </a:r>
+            <a:endParaRPr lang="LID4096" sz="2400" b="1" dirty="0"/>
+          </a:p>
+        </p:txBody>
+      </p:sp>
+      <p:sp>
+        <p:nvSpPr>
+          <p:cNvPr id="13" name="TextBox 12">
+            <a:extLst>
+              <a:ext uri="{FF2B5EF4-FFF2-40B4-BE49-F238E27FC236}">
+                <a16:creationId xmlns:a16="http://schemas.microsoft.com/office/drawing/2014/main" id="{62D6F1F8-B1CC-6223-0A12-E2FCBA87E2E9}"/>
+              </a:ext>
+            </a:extLst>
+          </p:cNvPr>
+          <p:cNvSpPr txBox="1"/>
+          <p:nvPr/>
+        </p:nvSpPr>
+        <p:spPr>
+          <a:xfrm>
+            <a:off x="1738798" y="957843"/>
+            <a:ext cx="3399259" cy="461665"/>
+          </a:xfrm>
+          <a:prstGeom prst="rect">
+            <a:avLst/>
+          </a:prstGeom>
+          <a:noFill/>
+        </p:spPr>
+        <p:txBody>
+          <a:bodyPr wrap="square">
+            <a:spAutoFit/>
+          </a:bodyPr>
+          <a:lstStyle/>
+          <a:p>
+            <a:r>
+              <a:rPr lang="LID4096" sz="2400" b="1" dirty="0">
                 <a:solidFill>
                   <a:srgbClr val="0000FF"/>
                 </a:solidFill>
+              </a:rPr>
+              <a:t>multi-timestep</a:t>
+            </a:r>
+            <a:r>
+              <a:rPr lang="pt-BR" sz="2400" b="1" dirty="0">
+                <a:solidFill>
+                  <a:srgbClr val="0000FF"/>
+                </a:solidFill>
+              </a:rPr>
+              <a:t> </a:t>
+            </a:r>
+            <a:r>
+              <a:rPr lang="LID4096" sz="2400" b="1" dirty="0">
+                <a:solidFill>
+                  <a:srgbClr val="0000FF"/>
+                </a:solidFill>
+              </a:rPr>
+              <a:t>methods</a:t>
+            </a:r>
+          </a:p>
+        </p:txBody>
+      </p:sp>
+      <p:pic>
+        <p:nvPicPr>
+          <p:cNvPr id="15" name="Picture 14">
+            <a:extLst>
+              <a:ext uri="{FF2B5EF4-FFF2-40B4-BE49-F238E27FC236}">
+                <a16:creationId xmlns:a16="http://schemas.microsoft.com/office/drawing/2014/main" id="{1FF72EBC-F7DC-34D1-9A2F-C0455CBFCFFB}"/>
+              </a:ext>
+            </a:extLst>
+          </p:cNvPr>
+          <p:cNvPicPr>
+            <a:picLocks noChangeAspect="1"/>
+          </p:cNvPicPr>
+          <p:nvPr/>
+        </p:nvPicPr>
+        <p:blipFill>
+          <a:blip r:embed="rId3"/>
+          <a:stretch>
+            <a:fillRect/>
+          </a:stretch>
+        </p:blipFill>
+        <p:spPr>
+          <a:xfrm>
+            <a:off x="426722" y="3293667"/>
+            <a:ext cx="8477250" cy="1752600"/>
+          </a:xfrm>
+          <a:prstGeom prst="rect">
+            <a:avLst/>
+          </a:prstGeom>
+        </p:spPr>
+      </p:pic>
+      <p:sp>
+        <p:nvSpPr>
+          <p:cNvPr id="17" name="TextBox 16">
+            <a:extLst>
+              <a:ext uri="{FF2B5EF4-FFF2-40B4-BE49-F238E27FC236}">
+                <a16:creationId xmlns:a16="http://schemas.microsoft.com/office/drawing/2014/main" id="{D42D4601-15DD-F79C-B8C9-2B4871CC5FD0}"/>
+              </a:ext>
+            </a:extLst>
+          </p:cNvPr>
+          <p:cNvSpPr txBox="1"/>
+          <p:nvPr/>
+        </p:nvSpPr>
+        <p:spPr>
+          <a:xfrm>
+            <a:off x="462993" y="3936225"/>
+            <a:ext cx="2551609" cy="1508105"/>
+          </a:xfrm>
+          <a:prstGeom prst="rect">
+            <a:avLst/>
+          </a:prstGeom>
+          <a:noFill/>
+        </p:spPr>
+        <p:txBody>
+          <a:bodyPr wrap="square">
+            <a:spAutoFit/>
+          </a:bodyPr>
+          <a:lstStyle/>
+          <a:p>
+            <a:r>
+              <a:rPr lang="en-GB" sz="2000" b="1" i="1" u="none" strike="noStrike" baseline="0" dirty="0">
+                <a:solidFill>
+                  <a:srgbClr val="0000FF"/>
+                </a:solidFill>
+                <a:latin typeface="STIXMath"/>
+              </a:rPr>
+              <a:t>𝜌,𝑐</a:t>
+            </a:r>
+            <a:r>
+              <a:rPr lang="en-GB" sz="900" b="1" i="1" u="none" strike="noStrike" baseline="0" dirty="0">
+                <a:solidFill>
+                  <a:srgbClr val="0000FF"/>
+                </a:solidFill>
+                <a:latin typeface="STIXMath"/>
+              </a:rPr>
+              <a:t>𝑝</a:t>
+            </a:r>
+            <a:r>
+              <a:rPr lang="en-GB" sz="2000" b="1" i="1" u="none" strike="noStrike" baseline="0" dirty="0">
+                <a:solidFill>
+                  <a:srgbClr val="0000FF"/>
+                </a:solidFill>
+                <a:latin typeface="STIXMath"/>
+              </a:rPr>
+              <a:t>,𝐿,𝑓</a:t>
+            </a:r>
+            <a:r>
+              <a:rPr lang="en-GB" sz="900" b="1" i="1" u="none" strike="noStrike" baseline="0" dirty="0">
+                <a:solidFill>
+                  <a:srgbClr val="0000FF"/>
+                </a:solidFill>
+                <a:latin typeface="STIXMath"/>
+              </a:rPr>
+              <a:t>𝑙 </a:t>
+            </a:r>
+            <a:r>
+              <a:rPr lang="en-GB" sz="2000" b="1" i="1" dirty="0">
+                <a:solidFill>
+                  <a:srgbClr val="0000FF"/>
+                </a:solidFill>
+                <a:latin typeface="STIXMath"/>
+              </a:rPr>
+              <a:t>,𝑟 </a:t>
+            </a:r>
+            <a:r>
+              <a:rPr lang="en-GB" sz="2000" b="1" i="1" u="none" strike="noStrike" baseline="0" dirty="0">
+                <a:solidFill>
+                  <a:srgbClr val="0000FF"/>
+                </a:solidFill>
+                <a:latin typeface="STIXMath"/>
+              </a:rPr>
+              <a:t> </a:t>
+            </a:r>
+          </a:p>
+          <a:p>
+            <a:r>
+              <a:rPr lang="en-GB" sz="1800" b="0" i="0" u="none" strike="noStrike" baseline="0" dirty="0">
+                <a:solidFill>
+                  <a:srgbClr val="000000"/>
+                </a:solidFill>
+                <a:latin typeface="Charis SIL"/>
+              </a:rPr>
+              <a:t>density</a:t>
+            </a:r>
+          </a:p>
+          <a:p>
+            <a:r>
+              <a:rPr lang="en-GB" sz="1800" b="0" i="0" u="none" strike="noStrike" baseline="0" dirty="0">
+                <a:solidFill>
+                  <a:srgbClr val="000000"/>
+                </a:solidFill>
+                <a:latin typeface="Charis SIL"/>
+              </a:rPr>
+              <a:t>specific and latent heats</a:t>
+            </a:r>
+          </a:p>
+          <a:p>
+            <a:r>
+              <a:rPr lang="en-GB" sz="1800" b="0" i="0" u="none" strike="noStrike" baseline="0" dirty="0">
+                <a:solidFill>
+                  <a:srgbClr val="000000"/>
+                </a:solidFill>
+                <a:latin typeface="Charis SIL"/>
+              </a:rPr>
+              <a:t>liquid fraction and </a:t>
+            </a:r>
+          </a:p>
+          <a:p>
+            <a:r>
+              <a:rPr lang="en-GB" sz="1800" b="0" i="0" u="none" strike="noStrike" baseline="0" dirty="0">
+                <a:solidFill>
+                  <a:srgbClr val="000000"/>
+                </a:solidFill>
+                <a:latin typeface="Charis SIL"/>
+              </a:rPr>
+              <a:t>power density </a:t>
+            </a:r>
+            <a:endParaRPr lang="LID4096" dirty="0"/>
+          </a:p>
+        </p:txBody>
+      </p:sp>
+      <p:sp>
+        <p:nvSpPr>
+          <p:cNvPr id="19" name="TextBox 18">
+            <a:extLst>
+              <a:ext uri="{FF2B5EF4-FFF2-40B4-BE49-F238E27FC236}">
+                <a16:creationId xmlns:a16="http://schemas.microsoft.com/office/drawing/2014/main" id="{B4614344-6462-498D-3537-B52335A1FEBA}"/>
+              </a:ext>
+            </a:extLst>
+          </p:cNvPr>
+          <p:cNvSpPr txBox="1"/>
+          <p:nvPr/>
+        </p:nvSpPr>
+        <p:spPr>
+          <a:xfrm>
+            <a:off x="462993" y="5444330"/>
+            <a:ext cx="3805646" cy="1231106"/>
+          </a:xfrm>
+          <a:prstGeom prst="rect">
+            <a:avLst/>
+          </a:prstGeom>
+          <a:noFill/>
+        </p:spPr>
+        <p:txBody>
+          <a:bodyPr wrap="square">
+            <a:spAutoFit/>
+          </a:bodyPr>
+          <a:lstStyle/>
+          <a:p>
+            <a:r>
+              <a:rPr lang="en-US" sz="2000" b="1" i="1" u="none" strike="noStrike" baseline="0" dirty="0" err="1">
+                <a:solidFill>
+                  <a:srgbClr val="0000FF"/>
+                </a:solidFill>
+                <a:latin typeface="STIXMath"/>
+              </a:rPr>
+              <a:t>ℎ</a:t>
+            </a:r>
+            <a:r>
+              <a:rPr lang="en-US" sz="900" b="1" i="0" u="none" strike="noStrike" baseline="0" dirty="0" err="1">
+                <a:solidFill>
+                  <a:srgbClr val="0000FF"/>
+                </a:solidFill>
+                <a:latin typeface="Charis SIL"/>
+              </a:rPr>
+              <a:t>conv</a:t>
+            </a:r>
+            <a:r>
+              <a:rPr lang="en-US" sz="2000" b="1" i="0" u="none" strike="noStrike" baseline="0" dirty="0">
+                <a:solidFill>
+                  <a:srgbClr val="0000FF"/>
+                </a:solidFill>
+                <a:latin typeface="Charis SIL"/>
+              </a:rPr>
+              <a:t>, </a:t>
+            </a:r>
+            <a:r>
+              <a:rPr lang="en-US" sz="2000" b="1" i="1" u="none" strike="noStrike" baseline="0" dirty="0">
+                <a:solidFill>
+                  <a:srgbClr val="0000FF"/>
+                </a:solidFill>
+                <a:latin typeface="STIXMath"/>
+              </a:rPr>
+              <a:t>𝜀</a:t>
+            </a:r>
+            <a:r>
+              <a:rPr lang="en-US" sz="2000" b="1" i="0" u="none" strike="noStrike" baseline="0" dirty="0">
+                <a:solidFill>
+                  <a:srgbClr val="0000FF"/>
+                </a:solidFill>
+                <a:latin typeface="Charis SIL"/>
+              </a:rPr>
+              <a:t>, </a:t>
+            </a:r>
+            <a:r>
+              <a:rPr lang="en-US" sz="2000" b="1" i="1" u="none" strike="noStrike" baseline="0" dirty="0">
+                <a:solidFill>
+                  <a:srgbClr val="0000FF"/>
+                </a:solidFill>
+                <a:latin typeface="STIXMath"/>
+              </a:rPr>
+              <a:t>𝜎</a:t>
+            </a:r>
+            <a:r>
+              <a:rPr lang="en-US" sz="2000" b="1" i="0" u="none" strike="noStrike" baseline="0" dirty="0">
+                <a:solidFill>
+                  <a:srgbClr val="0000FF"/>
+                </a:solidFill>
+                <a:latin typeface="Charis SIL"/>
+              </a:rPr>
+              <a:t>, </a:t>
+            </a:r>
+            <a:r>
+              <a:rPr lang="en-US" sz="2000" b="1" i="1" u="none" strike="noStrike" baseline="0" dirty="0">
+                <a:solidFill>
+                  <a:srgbClr val="0000FF"/>
+                </a:solidFill>
+                <a:latin typeface="STIXMath"/>
+              </a:rPr>
+              <a:t>𝑇</a:t>
+            </a:r>
+            <a:r>
+              <a:rPr lang="en-US" sz="900" b="1" i="0" u="none" strike="noStrike" baseline="0" dirty="0">
+                <a:solidFill>
+                  <a:srgbClr val="0000FF"/>
+                </a:solidFill>
+                <a:latin typeface="Charis SIL"/>
+              </a:rPr>
+              <a:t>env</a:t>
+            </a:r>
+            <a:r>
+              <a:rPr lang="en-US" sz="2000" b="1" i="0" u="none" strike="noStrike" baseline="0" dirty="0">
+                <a:solidFill>
+                  <a:srgbClr val="0000FF"/>
+                </a:solidFill>
+                <a:latin typeface="Charis SIL"/>
+              </a:rPr>
+              <a:t>, </a:t>
+            </a:r>
+            <a:r>
+              <a:rPr lang="en-US" sz="2000" b="1" i="1" u="none" strike="noStrike" baseline="0" dirty="0">
+                <a:solidFill>
+                  <a:srgbClr val="0000FF"/>
+                </a:solidFill>
+                <a:latin typeface="STIXMath"/>
+              </a:rPr>
+              <a:t>𝑇</a:t>
+            </a:r>
+            <a:r>
+              <a:rPr lang="en-US" sz="900" b="1" i="0" u="none" strike="noStrike" baseline="0" dirty="0">
+                <a:solidFill>
+                  <a:srgbClr val="0000FF"/>
+                </a:solidFill>
+                <a:latin typeface="STIXMath"/>
+              </a:rPr>
+              <a:t>0</a:t>
+            </a:r>
+          </a:p>
+          <a:p>
+            <a:r>
+              <a:rPr lang="en-US" sz="1800" b="0" i="0" u="none" strike="noStrike" baseline="0" dirty="0">
+                <a:solidFill>
+                  <a:srgbClr val="000000"/>
+                </a:solidFill>
+                <a:latin typeface="Charis SIL"/>
+              </a:rPr>
+              <a:t>convection heat transfer coefficient</a:t>
+            </a:r>
+          </a:p>
+          <a:p>
+            <a:r>
+              <a:rPr lang="en-US" sz="1800" b="0" i="0" u="none" strike="noStrike" baseline="0" dirty="0">
+                <a:solidFill>
+                  <a:srgbClr val="000000"/>
+                </a:solidFill>
+                <a:latin typeface="Charis SIL"/>
+              </a:rPr>
+              <a:t>emissivity, Stefan–Boltzmann constant </a:t>
+            </a:r>
+          </a:p>
+          <a:p>
+            <a:r>
+              <a:rPr lang="en-US" sz="1800" b="0" i="0" u="none" strike="noStrike" baseline="0" dirty="0">
+                <a:solidFill>
+                  <a:srgbClr val="000000"/>
+                </a:solidFill>
+                <a:latin typeface="Charis SIL"/>
+              </a:rPr>
+              <a:t>environment &amp; initial temperatures </a:t>
+            </a:r>
+            <a:endParaRPr lang="LID4096" dirty="0"/>
+          </a:p>
+        </p:txBody>
+      </p:sp>
+      <p:sp>
+        <p:nvSpPr>
+          <p:cNvPr id="21" name="TextBox 20">
+            <a:extLst>
+              <a:ext uri="{FF2B5EF4-FFF2-40B4-BE49-F238E27FC236}">
+                <a16:creationId xmlns:a16="http://schemas.microsoft.com/office/drawing/2014/main" id="{660B9153-75B0-027B-C081-E78A1381EC58}"/>
+              </a:ext>
+            </a:extLst>
+          </p:cNvPr>
+          <p:cNvSpPr txBox="1"/>
+          <p:nvPr/>
+        </p:nvSpPr>
+        <p:spPr>
+          <a:xfrm>
+            <a:off x="6522722" y="410348"/>
+            <a:ext cx="1689460" cy="830997"/>
+          </a:xfrm>
+          <a:prstGeom prst="rect">
+            <a:avLst/>
+          </a:prstGeom>
+          <a:noFill/>
+        </p:spPr>
+        <p:txBody>
+          <a:bodyPr wrap="square">
+            <a:spAutoFit/>
+          </a:bodyPr>
+          <a:lstStyle>
+            <a:defPPr>
+              <a:defRPr lang="LID4096"/>
+            </a:defPPr>
+            <a:lvl1pPr>
+              <a:defRPr sz="2400" b="1" i="0" u="none" strike="noStrike" baseline="0">
+                <a:solidFill>
+                  <a:srgbClr val="000000"/>
+                </a:solidFill>
+                <a:latin typeface="Charis SIL"/>
               </a:defRPr>
             </a:lvl1pPr>
           </a:lstStyle>
           <a:p>
-            <a:r>
-              <a:rPr lang="LID4096" sz="1400" dirty="0"/>
-              <a:t>external work of the thermal loads</a:t>
+            <a:pPr algn="ctr"/>
+            <a:r>
+              <a:rPr lang="LID4096" dirty="0"/>
+              <a:t>latent heat treatment</a:t>
             </a:r>
           </a:p>
         </p:txBody>
       </p:sp>
-      <p:grpSp>
-        <p:nvGrpSpPr>
-          <p:cNvPr id="41" name="Group 40">
-            <a:extLst>
-              <a:ext uri="{FF2B5EF4-FFF2-40B4-BE49-F238E27FC236}">
-                <a16:creationId xmlns:a16="http://schemas.microsoft.com/office/drawing/2014/main" id="{42884BF6-7107-207F-BD5F-B4C5C233DF35}"/>
-              </a:ext>
-            </a:extLst>
-          </p:cNvPr>
-          <p:cNvGrpSpPr/>
+      <p:sp>
+        <p:nvSpPr>
+          <p:cNvPr id="23" name="TextBox 22">
+            <a:extLst>
+              <a:ext uri="{FF2B5EF4-FFF2-40B4-BE49-F238E27FC236}">
+                <a16:creationId xmlns:a16="http://schemas.microsoft.com/office/drawing/2014/main" id="{BD2A4ADE-6940-4338-444E-1058736549F8}"/>
+              </a:ext>
+            </a:extLst>
+          </p:cNvPr>
+          <p:cNvSpPr txBox="1"/>
           <p:nvPr/>
-        </p:nvGrpSpPr>
-        <p:grpSpPr>
+        </p:nvSpPr>
+        <p:spPr>
           <a:xfrm>
-            <a:off x="5870960" y="1834786"/>
-            <a:ext cx="5979524" cy="3422317"/>
-            <a:chOff x="5564776" y="1514855"/>
-            <a:chExt cx="5979524" cy="3422317"/>
+            <a:off x="8046720" y="1940841"/>
+            <a:ext cx="2995749" cy="369332"/>
           </a:xfrm>
-        </p:grpSpPr>
-        <p:grpSp>
-          <p:nvGrpSpPr>
-            <p:cNvPr id="33" name="Group 32">
-              <a:extLst>
-                <a:ext uri="{FF2B5EF4-FFF2-40B4-BE49-F238E27FC236}">
-                  <a16:creationId xmlns:a16="http://schemas.microsoft.com/office/drawing/2014/main" id="{36DAC0AD-FD90-EDDD-759F-9EB4DA08F0A4}"/>
-                </a:ext>
-              </a:extLst>
-            </p:cNvPr>
-            <p:cNvGrpSpPr/>
-            <p:nvPr/>
-          </p:nvGrpSpPr>
-          <p:grpSpPr>
-            <a:xfrm>
-              <a:off x="5564776" y="1514855"/>
-              <a:ext cx="5979524" cy="2569401"/>
-              <a:chOff x="676003" y="334424"/>
-              <a:chExt cx="5979524" cy="2569401"/>
-            </a:xfrm>
-          </p:grpSpPr>
-          <p:pic>
-            <p:nvPicPr>
-              <p:cNvPr id="5" name="Picture 4">
-                <a:extLst>
-                  <a:ext uri="{FF2B5EF4-FFF2-40B4-BE49-F238E27FC236}">
-                    <a16:creationId xmlns:a16="http://schemas.microsoft.com/office/drawing/2014/main" id="{E5E0877E-0A06-E5B1-0B43-BBC1749C3AA4}"/>
-                  </a:ext>
-                </a:extLst>
-              </p:cNvPr>
-              <p:cNvPicPr>
-                <a:picLocks noChangeAspect="1"/>
-              </p:cNvPicPr>
-              <p:nvPr/>
-            </p:nvPicPr>
-            <p:blipFill>
-              <a:blip r:embed="rId3"/>
-              <a:stretch>
-                <a:fillRect/>
-              </a:stretch>
-            </p:blipFill>
-            <p:spPr>
-              <a:xfrm>
-                <a:off x="738051" y="419236"/>
-                <a:ext cx="1676400" cy="428625"/>
-              </a:xfrm>
-              <a:prstGeom prst="rect">
-                <a:avLst/>
-              </a:prstGeom>
-            </p:spPr>
-          </p:pic>
-          <p:sp>
-            <p:nvSpPr>
-              <p:cNvPr id="7" name="TextBox 6">
-                <a:extLst>
-                  <a:ext uri="{FF2B5EF4-FFF2-40B4-BE49-F238E27FC236}">
-                    <a16:creationId xmlns:a16="http://schemas.microsoft.com/office/drawing/2014/main" id="{63826787-2279-F854-B987-63CF4E26EB9C}"/>
-                  </a:ext>
-                </a:extLst>
-              </p:cNvPr>
-              <p:cNvSpPr txBox="1"/>
-              <p:nvPr/>
-            </p:nvSpPr>
-            <p:spPr>
-              <a:xfrm>
-                <a:off x="3805100" y="334424"/>
-                <a:ext cx="2850427" cy="1523494"/>
-              </a:xfrm>
-              <a:prstGeom prst="rect">
-                <a:avLst/>
-              </a:prstGeom>
-              <a:noFill/>
-              <a:ln>
+          <a:prstGeom prst="rect">
+            <a:avLst/>
+          </a:prstGeom>
+          <a:noFill/>
+        </p:spPr>
+        <p:txBody>
+          <a:bodyPr wrap="square">
+            <a:spAutoFit/>
+          </a:bodyPr>
+          <a:lstStyle/>
+          <a:p>
+            <a:r>
+              <a:rPr lang="en-US" sz="1800" b="0" i="0" u="none" strike="noStrike" baseline="0" dirty="0">
                 <a:solidFill>
-                  <a:schemeClr val="tx1"/>
+                  <a:srgbClr val="000000"/>
                 </a:solidFill>
-              </a:ln>
-            </p:spPr>
-            <p:txBody>
-              <a:bodyPr wrap="square">
-                <a:spAutoFit/>
-              </a:bodyPr>
-              <a:lstStyle/>
-              <a:p>
-                <a:r>
-                  <a:rPr lang="en-US" sz="1800" b="0" i="1" u="none" strike="noStrike" baseline="0" dirty="0">
-                    <a:latin typeface="STIXMath-Italic"/>
-                  </a:rPr>
-                  <a:t>̇</a:t>
-                </a:r>
-                <a:r>
-                  <a:rPr lang="en-US" sz="1800" b="0" i="1" u="none" strike="noStrike" baseline="0" dirty="0">
-                    <a:latin typeface="STIXGeneral-Italic2"/>
-                  </a:rPr>
-                  <a:t>H   </a:t>
-                </a:r>
-                <a:r>
-                  <a:rPr lang="en-GB" dirty="0">
-                    <a:latin typeface="STIX-Regular"/>
-                  </a:rPr>
-                  <a:t>rate of enthalpy</a:t>
-                </a:r>
-                <a:endParaRPr lang="en-US" sz="1800" b="0" i="1" u="none" strike="noStrike" baseline="0" dirty="0">
-                  <a:latin typeface="STIXGeneral-Italic2"/>
-                </a:endParaRPr>
-              </a:p>
-              <a:p>
-                <a:r>
-                  <a:rPr lang="en-GB" sz="1800" b="1" i="1" u="none" strike="noStrike" baseline="0" dirty="0">
-                    <a:latin typeface="STIXGeneral-BoldItalic"/>
-                  </a:rPr>
-                  <a:t>q   </a:t>
-                </a:r>
-                <a:r>
-                  <a:rPr lang="en-GB" sz="1800" b="0" i="0" u="none" strike="noStrike" baseline="0" dirty="0">
-                    <a:latin typeface="STIX-Regular"/>
-                  </a:rPr>
-                  <a:t>heat-flux per unit volume</a:t>
-                </a:r>
-              </a:p>
-              <a:p>
-                <a:r>
-                  <a:rPr lang="en-GB" i="1" dirty="0">
-                    <a:latin typeface="STIXGeneral-Italic3"/>
-                  </a:rPr>
-                  <a:t>r</a:t>
-                </a:r>
-                <a:r>
-                  <a:rPr lang="en-GB" i="1" dirty="0">
-                    <a:latin typeface="STIXMath-Italic"/>
-                  </a:rPr>
-                  <a:t>̇  </a:t>
-                </a:r>
-                <a:r>
-                  <a:rPr lang="en-GB" dirty="0">
-                    <a:latin typeface="STIX-Regular"/>
-                  </a:rPr>
-                  <a:t>  rate of heat source</a:t>
-                </a:r>
-                <a:endParaRPr lang="en-GB" i="1" dirty="0">
-                  <a:latin typeface="STIXMath-Italic"/>
-                </a:endParaRPr>
-              </a:p>
-              <a:p>
-                <a:endParaRPr lang="en-GB" sz="300" b="0" i="0" u="none" strike="noStrike" baseline="0" dirty="0">
-                  <a:latin typeface="STIX-Regular"/>
-                </a:endParaRPr>
-              </a:p>
-              <a:p>
-                <a:r>
-                  <a:rPr lang="en-GB" dirty="0">
-                    <a:latin typeface="STIX-Regular"/>
-                  </a:rPr>
-                  <a:t>C   </a:t>
-                </a:r>
-                <a:r>
-                  <a:rPr lang="en-GB" dirty="0"/>
-                  <a:t>(temperature dependent) heat capacity</a:t>
-                </a:r>
-                <a:endParaRPr lang="LID4096" dirty="0"/>
-              </a:p>
-            </p:txBody>
-          </p:sp>
-          <p:pic>
-            <p:nvPicPr>
-              <p:cNvPr id="9" name="Picture 8">
-                <a:extLst>
-                  <a:ext uri="{FF2B5EF4-FFF2-40B4-BE49-F238E27FC236}">
-                    <a16:creationId xmlns:a16="http://schemas.microsoft.com/office/drawing/2014/main" id="{0233BAAB-ABE6-5897-4FB7-A0AF4988C8A9}"/>
-                  </a:ext>
-                </a:extLst>
-              </p:cNvPr>
-              <p:cNvPicPr>
-                <a:picLocks noChangeAspect="1"/>
-              </p:cNvPicPr>
-              <p:nvPr/>
-            </p:nvPicPr>
-            <p:blipFill>
-              <a:blip r:embed="rId4"/>
-              <a:srcRect t="18000" b="13963"/>
-              <a:stretch>
-                <a:fillRect/>
-              </a:stretch>
-            </p:blipFill>
-            <p:spPr>
-              <a:xfrm>
-                <a:off x="1738992" y="796115"/>
-                <a:ext cx="1285875" cy="324024"/>
-              </a:xfrm>
-              <a:prstGeom prst="rect">
-                <a:avLst/>
-              </a:prstGeom>
-            </p:spPr>
-          </p:pic>
-          <p:pic>
-            <p:nvPicPr>
-              <p:cNvPr id="11" name="Picture 10">
-                <a:extLst>
-                  <a:ext uri="{FF2B5EF4-FFF2-40B4-BE49-F238E27FC236}">
-                    <a16:creationId xmlns:a16="http://schemas.microsoft.com/office/drawing/2014/main" id="{41D14760-1E87-0A6F-3873-6AD13A5FCCEF}"/>
-                  </a:ext>
-                </a:extLst>
-              </p:cNvPr>
-              <p:cNvPicPr>
-                <a:picLocks noChangeAspect="1"/>
-              </p:cNvPicPr>
-              <p:nvPr/>
-            </p:nvPicPr>
-            <p:blipFill>
-              <a:blip r:embed="rId5"/>
-              <a:stretch>
-                <a:fillRect/>
-              </a:stretch>
-            </p:blipFill>
-            <p:spPr>
-              <a:xfrm>
-                <a:off x="738051" y="997075"/>
-                <a:ext cx="1009650" cy="390525"/>
-              </a:xfrm>
-              <a:prstGeom prst="rect">
-                <a:avLst/>
-              </a:prstGeom>
-            </p:spPr>
-          </p:pic>
-          <p:grpSp>
-            <p:nvGrpSpPr>
-              <p:cNvPr id="24" name="Group 23">
-                <a:extLst>
-                  <a:ext uri="{FF2B5EF4-FFF2-40B4-BE49-F238E27FC236}">
-                    <a16:creationId xmlns:a16="http://schemas.microsoft.com/office/drawing/2014/main" id="{42164C09-3E45-EAB5-94A0-D52A6CAFF7B3}"/>
-                  </a:ext>
-                </a:extLst>
-              </p:cNvPr>
-              <p:cNvGrpSpPr/>
-              <p:nvPr/>
-            </p:nvGrpSpPr>
-            <p:grpSpPr>
-              <a:xfrm>
-                <a:off x="738051" y="1427352"/>
-                <a:ext cx="2848519" cy="476250"/>
-                <a:chOff x="738051" y="1340265"/>
-                <a:chExt cx="2848519" cy="476250"/>
-              </a:xfrm>
-            </p:grpSpPr>
-            <p:pic>
-              <p:nvPicPr>
-                <p:cNvPr id="13" name="Picture 12">
-                  <a:extLst>
-                    <a:ext uri="{FF2B5EF4-FFF2-40B4-BE49-F238E27FC236}">
-                      <a16:creationId xmlns:a16="http://schemas.microsoft.com/office/drawing/2014/main" id="{03048724-9AC1-2634-3030-559A1647CEBB}"/>
-                    </a:ext>
-                  </a:extLst>
-                </p:cNvPr>
-                <p:cNvPicPr>
-                  <a:picLocks noChangeAspect="1"/>
-                </p:cNvPicPr>
-                <p:nvPr/>
-              </p:nvPicPr>
-              <p:blipFill>
-                <a:blip r:embed="rId6"/>
-                <a:srcRect t="-2041" r="20544"/>
-                <a:stretch>
-                  <a:fillRect/>
-                </a:stretch>
-              </p:blipFill>
-              <p:spPr>
-                <a:xfrm>
-                  <a:off x="738051" y="1340265"/>
-                  <a:ext cx="2066108" cy="476250"/>
-                </a:xfrm>
-                <a:prstGeom prst="rect">
-                  <a:avLst/>
-                </a:prstGeom>
-              </p:spPr>
-            </p:pic>
-            <p:pic>
-              <p:nvPicPr>
-                <p:cNvPr id="16" name="Picture 15">
-                  <a:extLst>
-                    <a:ext uri="{FF2B5EF4-FFF2-40B4-BE49-F238E27FC236}">
-                      <a16:creationId xmlns:a16="http://schemas.microsoft.com/office/drawing/2014/main" id="{CAA6090C-5358-9B70-4C86-B31AA578B2F0}"/>
-                    </a:ext>
-                  </a:extLst>
-                </p:cNvPr>
-                <p:cNvPicPr>
-                  <a:picLocks noChangeAspect="1"/>
-                </p:cNvPicPr>
-                <p:nvPr/>
-              </p:nvPicPr>
-              <p:blipFill>
-                <a:blip r:embed="rId6"/>
-                <a:srcRect l="78954"/>
-                <a:stretch>
-                  <a:fillRect/>
-                </a:stretch>
-              </p:blipFill>
-              <p:spPr>
-                <a:xfrm>
-                  <a:off x="3039291" y="1345027"/>
-                  <a:ext cx="547279" cy="466725"/>
-                </a:xfrm>
-                <a:prstGeom prst="rect">
-                  <a:avLst/>
-                </a:prstGeom>
-              </p:spPr>
-            </p:pic>
-          </p:grpSp>
-          <p:pic>
-            <p:nvPicPr>
-              <p:cNvPr id="18" name="Picture 17">
-                <a:extLst>
-                  <a:ext uri="{FF2B5EF4-FFF2-40B4-BE49-F238E27FC236}">
-                    <a16:creationId xmlns:a16="http://schemas.microsoft.com/office/drawing/2014/main" id="{7A8DCB8C-179F-7DC5-2651-1DB79A198442}"/>
-                  </a:ext>
-                </a:extLst>
-              </p:cNvPr>
-              <p:cNvPicPr>
-                <a:picLocks noChangeAspect="1"/>
-              </p:cNvPicPr>
-              <p:nvPr/>
-            </p:nvPicPr>
-            <p:blipFill>
-              <a:blip r:embed="rId7"/>
-              <a:srcRect b="45832"/>
-              <a:stretch>
-                <a:fillRect/>
-              </a:stretch>
-            </p:blipFill>
-            <p:spPr>
-              <a:xfrm>
-                <a:off x="676003" y="2031879"/>
-                <a:ext cx="4953000" cy="871946"/>
-              </a:xfrm>
-              <a:prstGeom prst="rect">
-                <a:avLst/>
-              </a:prstGeom>
-            </p:spPr>
-          </p:pic>
-          <p:sp>
-            <p:nvSpPr>
-              <p:cNvPr id="27" name="Rectangle 26">
-                <a:extLst>
-                  <a:ext uri="{FF2B5EF4-FFF2-40B4-BE49-F238E27FC236}">
-                    <a16:creationId xmlns:a16="http://schemas.microsoft.com/office/drawing/2014/main" id="{2752B941-3E23-0EEE-3C03-4FAF44369101}"/>
-                  </a:ext>
-                </a:extLst>
-              </p:cNvPr>
-              <p:cNvSpPr/>
-              <p:nvPr/>
-            </p:nvSpPr>
-            <p:spPr>
-              <a:xfrm>
-                <a:off x="676003" y="334424"/>
-                <a:ext cx="2711631" cy="1092928"/>
-              </a:xfrm>
-              <a:prstGeom prst="rect">
-                <a:avLst/>
-              </a:prstGeom>
-              <a:noFill/>
-              <a:ln>
-                <a:solidFill>
-                  <a:schemeClr val="tx1"/>
-                </a:solidFill>
-              </a:ln>
-            </p:spPr>
-            <p:style>
-              <a:lnRef idx="2">
-                <a:schemeClr val="accent1">
-                  <a:shade val="15000"/>
-                </a:schemeClr>
-              </a:lnRef>
-              <a:fillRef idx="1">
-                <a:schemeClr val="accent1"/>
-              </a:fillRef>
-              <a:effectRef idx="0">
-                <a:schemeClr val="accent1"/>
-              </a:effectRef>
-              <a:fontRef idx="minor">
-                <a:schemeClr val="lt1"/>
-              </a:fontRef>
-            </p:style>
-            <p:txBody>
-              <a:bodyPr rtlCol="0" anchor="ctr"/>
-              <a:lstStyle/>
-              <a:p>
-                <a:pPr algn="ctr"/>
-                <a:endParaRPr lang="LID4096"/>
-              </a:p>
-            </p:txBody>
-          </p:sp>
-        </p:grpSp>
-        <p:pic>
-          <p:nvPicPr>
-            <p:cNvPr id="40" name="Picture 39">
-              <a:extLst>
-                <a:ext uri="{FF2B5EF4-FFF2-40B4-BE49-F238E27FC236}">
-                  <a16:creationId xmlns:a16="http://schemas.microsoft.com/office/drawing/2014/main" id="{6E57E60B-F3DF-524A-8F29-346395CE7084}"/>
-                </a:ext>
-              </a:extLst>
-            </p:cNvPr>
-            <p:cNvPicPr>
-              <a:picLocks noChangeAspect="1"/>
-            </p:cNvPicPr>
-            <p:nvPr/>
-          </p:nvPicPr>
-          <p:blipFill>
-            <a:blip r:embed="rId7"/>
-            <a:srcRect t="55094"/>
-            <a:stretch>
-              <a:fillRect/>
-            </a:stretch>
-          </p:blipFill>
-          <p:spPr>
-            <a:xfrm>
-              <a:off x="5567315" y="4214301"/>
-              <a:ext cx="4953000" cy="722871"/>
-            </a:xfrm>
-            <a:prstGeom prst="rect">
-              <a:avLst/>
-            </a:prstGeom>
-          </p:spPr>
-        </p:pic>
-      </p:grpSp>
+                <a:latin typeface="Charis SIL"/>
+              </a:rPr>
+              <a:t>born-dead element technique</a:t>
+            </a:r>
+            <a:endParaRPr lang="LID4096" dirty="0"/>
+          </a:p>
+        </p:txBody>
+      </p:sp>
     </p:spTree>
     <p:extLst>
       <p:ext uri="{BB962C8B-B14F-4D97-AF65-F5344CB8AC3E}">
-        <p14:creationId xmlns:p14="http://schemas.microsoft.com/office/powerpoint/2010/main" val="872693095"/>
+        <p14:creationId xmlns:p14="http://schemas.microsoft.com/office/powerpoint/2010/main" val="1057906815"/>
       </p:ext>
     </p:extLst>
   </p:cSld>
